--- a/BrainSpark_Business_Case.pptx
+++ b/BrainSpark_Business_Case.pptx
@@ -908,7 +908,7 @@
                 <a:ea typeface="Arial" pitchFamily="34" charset="-122"/>
                 <a:cs typeface="Arial" pitchFamily="34" charset="-120"/>
               </a:rPr>
-              <a:t>AI IDEA GENERATION BUSINESS CASE</a:t>
+              <a:t>IDEA GENERATION BUSINESS CASE</a:t>
             </a:r>
             <a:endParaRPr lang="en-US" sz="850" dirty="0"/>
           </a:p>
@@ -947,7 +947,7 @@
                 <a:ea typeface="Arial" pitchFamily="34" charset="-122"/>
                 <a:cs typeface="Arial" pitchFamily="34" charset="-120"/>
               </a:rPr>
-              <a:t>BrainSpark  –  AI-Assisted Cost Reduction Idea Generation</a:t>
+              <a:t>BrainSpark  –  Cost Reduction Idea Generation</a:t>
             </a:r>
             <a:endParaRPr lang="en-US" sz="1800" dirty="0"/>
           </a:p>
@@ -962,11 +962,11 @@
         <p:spPr>
           <a:xfrm>
             <a:off x="228600" y="859536"/>
-            <a:ext cx="5989320" cy="1152144"/>
+            <a:ext cx="5989320" cy="1508760"/>
           </a:xfrm>
           <a:prstGeom prst="roundRect">
             <a:avLst>
-              <a:gd name="adj" fmla="val 7143"/>
+              <a:gd name="adj" fmla="val 5455"/>
             </a:avLst>
           </a:prstGeom>
           <a:solidFill>
@@ -1091,8 +1091,8 @@
         </p:nvSpPr>
         <p:spPr>
           <a:xfrm>
-            <a:off x="438912" y="1225296"/>
-            <a:ext cx="5568696" cy="877824"/>
+            <a:off x="438912" y="1207008"/>
+            <a:ext cx="5568696" cy="1143000"/>
           </a:xfrm>
           <a:prstGeom prst="rect">
             <a:avLst/>
@@ -1123,7 +1123,7 @@
                 <a:ea typeface="Arial" pitchFamily="34" charset="-122"/>
                 <a:cs typeface="Arial" pitchFamily="34" charset="-120"/>
               </a:rPr>
-              <a:t>Cost reduction ideas come from workshops, so the output depends on who is in the room that week.</a:t>
+              <a:t>Cost reduction ideas come out of workshops. Setting one up takes weeks, and what comes out of it depends on who happened to be free that week.</a:t>
             </a:r>
             <a:endParaRPr lang="en-US" sz="820" dirty="0"/>
           </a:p>
@@ -1147,7 +1147,7 @@
                 <a:ea typeface="Arial" pitchFamily="34" charset="-122"/>
                 <a:cs typeface="Arial" pitchFamily="34" charset="-120"/>
               </a:rPr>
-              <a:t>Ideas arrive as one-liners — no process, no part detail, no number attached.</a:t>
+              <a:t>Most ideas arrive as a single line — "change the material", "delete the bracket". No process named, no grade, no tolerance and no number.</a:t>
             </a:r>
             <a:endParaRPr lang="en-US" sz="820" dirty="0"/>
           </a:p>
@@ -1171,7 +1171,7 @@
                 <a:ea typeface="Arial" pitchFamily="34" charset="-122"/>
                 <a:cs typeface="Arial" pitchFamily="34" charset="-120"/>
               </a:rPr>
-              <a:t>Savings are estimated from opinion, so Finance discounts them until someone proves them.</a:t>
+              <a:t>Nobody knows whether an idea is worth 20p or £2 until someone costs it by hand.</a:t>
             </a:r>
             <a:endParaRPr lang="en-US" sz="820" dirty="0"/>
           </a:p>
@@ -1195,7 +1195,31 @@
                 <a:ea typeface="Arial" pitchFamily="34" charset="-122"/>
                 <a:cs typeface="Arial" pitchFamily="34" charset="-120"/>
               </a:rPr>
-              <a:t>Only the parts the attendees know get looked at, and nothing brings in benchmark or cross-industry data.</a:t>
+              <a:t>A programme has thousands of parts. A workshop gets through a few dozen, and whole commodities are skipped because nobody in the room knew them.</a:t>
+            </a:r>
+            <a:endParaRPr lang="en-US" sz="820" dirty="0"/>
+          </a:p>
+          <a:p>
+            <a:pPr marL="342900" indent="-342900">
+              <a:lnSpc>
+                <a:spcPct val="95000"/>
+              </a:lnSpc>
+              <a:spcAft>
+                <a:spcPts val="100"/>
+              </a:spcAft>
+              <a:buSzPct val="100000"/>
+              <a:buChar char="•"/>
+            </a:pPr>
+            <a:r>
+              <a:rPr lang="en-US" sz="820" dirty="0">
+                <a:solidFill>
+                  <a:srgbClr val="1F2328"/>
+                </a:solidFill>
+                <a:latin typeface="Arial" pitchFamily="34" charset="0"/>
+                <a:ea typeface="Arial" pitchFamily="34" charset="-122"/>
+                <a:cs typeface="Arial" pitchFamily="34" charset="-120"/>
+              </a:rPr>
+              <a:t>The same ideas come round again on the next programme, because there is no record of what was already tried and what it turned out to be worth.</a:t>
             </a:r>
             <a:endParaRPr lang="en-US" sz="820" dirty="0"/>
           </a:p>
@@ -1209,12 +1233,12 @@
         </p:nvSpPr>
         <p:spPr>
           <a:xfrm>
-            <a:off x="228600" y="2103120"/>
-            <a:ext cx="5989320" cy="1188720"/>
+            <a:off x="228600" y="2441448"/>
+            <a:ext cx="5989320" cy="1627632"/>
           </a:xfrm>
           <a:prstGeom prst="roundRect">
             <a:avLst>
-              <a:gd name="adj" fmla="val 6923"/>
+              <a:gd name="adj" fmla="val 5056"/>
             </a:avLst>
           </a:prstGeom>
           <a:solidFill>
@@ -1236,7 +1260,7 @@
         </p:nvSpPr>
         <p:spPr>
           <a:xfrm>
-            <a:off x="438912" y="2194560"/>
+            <a:off x="438912" y="2532888"/>
             <a:ext cx="2377440" cy="219456"/>
           </a:xfrm>
           <a:prstGeom prst="rect">
@@ -1275,8 +1299,8 @@
         </p:nvSpPr>
         <p:spPr>
           <a:xfrm>
-            <a:off x="438912" y="2468880"/>
-            <a:ext cx="5568696" cy="877824"/>
+            <a:off x="438912" y="2788920"/>
+            <a:ext cx="5568696" cy="1261872"/>
           </a:xfrm>
           <a:prstGeom prst="rect">
             <a:avLst/>
@@ -1307,7 +1331,7 @@
                 <a:ea typeface="Arial" pitchFamily="34" charset="-122"/>
                 <a:cs typeface="Arial" pitchFamily="34" charset="-120"/>
               </a:rPr>
-              <a:t>People-dependent and skill-dependent: a few experienced engineers carry it. When they are busy, idea flow stops.</a:t>
+              <a:t>One or two experienced engineers carry most of the idea generation. When they are on other work, or they leave, it stops.</a:t>
             </a:r>
             <a:endParaRPr lang="en-US" sz="820" dirty="0"/>
           </a:p>
@@ -1331,7 +1355,7 @@
                 <a:ea typeface="Arial" pitchFamily="34" charset="-122"/>
                 <a:cs typeface="Arial" pitchFamily="34" charset="-120"/>
               </a:rPr>
-              <a:t>Days of manual preparation — drawings, BOMs, cost data, benchmarks — before a workshop can even run.</a:t>
+              <a:t>Before a workshop can run, someone spends days pulling together drawings, BOMs, current piece costs and benchmark data by hand.</a:t>
             </a:r>
             <a:endParaRPr lang="en-US" sz="820" dirty="0"/>
           </a:p>
@@ -1355,7 +1379,7 @@
                 <a:ea typeface="Arial" pitchFamily="34" charset="-122"/>
                 <a:cs typeface="Arial" pitchFamily="34" charset="-120"/>
               </a:rPr>
-              <a:t>8–15 people off the job for one to two days, then weeks of chasing authors for enough detail to cost an idea.</a:t>
+              <a:t>The workshop itself takes eight to fifteen people off the job for one or two days.</a:t>
             </a:r>
             <a:endParaRPr lang="en-US" sz="820" dirty="0"/>
           </a:p>
@@ -1379,7 +1403,55 @@
                 <a:ea typeface="Arial" pitchFamily="34" charset="-122"/>
                 <a:cs typeface="Arial" pitchFamily="34" charset="-120"/>
               </a:rPr>
-              <a:t>Many ideas are never completed and quietly drop out; what was proven or rejected elsewhere is invisible.</a:t>
+              <a:t>Afterwards the organiser goes back to each person to ask what they actually meant, whether it can be done, and what it might save. Many never reply, and those ideas quietly die.</a:t>
+            </a:r>
+            <a:endParaRPr lang="en-US" sz="820" dirty="0"/>
+          </a:p>
+          <a:p>
+            <a:pPr marL="342900" indent="-342900">
+              <a:lnSpc>
+                <a:spcPct val="95000"/>
+              </a:lnSpc>
+              <a:spcAft>
+                <a:spcPts val="100"/>
+              </a:spcAft>
+              <a:buSzPct val="100000"/>
+              <a:buChar char="•"/>
+            </a:pPr>
+            <a:r>
+              <a:rPr lang="en-US" sz="820" dirty="0">
+                <a:solidFill>
+                  <a:srgbClr val="1F2328"/>
+                </a:solidFill>
+                <a:latin typeface="Arial" pitchFamily="34" charset="0"/>
+                <a:ea typeface="Arial" pitchFamily="34" charset="-122"/>
+                <a:cs typeface="Arial" pitchFamily="34" charset="-120"/>
+              </a:rPr>
+              <a:t>Savings are a judgement call rather than a calculation, so Finance discounts them. The number that reaches the plan is never the number on the sheet.</a:t>
+            </a:r>
+            <a:endParaRPr lang="en-US" sz="820" dirty="0"/>
+          </a:p>
+          <a:p>
+            <a:pPr marL="342900" indent="-342900">
+              <a:lnSpc>
+                <a:spcPct val="95000"/>
+              </a:lnSpc>
+              <a:spcAft>
+                <a:spcPts val="100"/>
+              </a:spcAft>
+              <a:buSzPct val="100000"/>
+              <a:buChar char="•"/>
+            </a:pPr>
+            <a:r>
+              <a:rPr lang="en-US" sz="820" dirty="0">
+                <a:solidFill>
+                  <a:srgbClr val="1F2328"/>
+                </a:solidFill>
+                <a:latin typeface="Arial" pitchFamily="34" charset="0"/>
+                <a:ea typeface="Arial" pitchFamily="34" charset="-122"/>
+                <a:cs typeface="Arial" pitchFamily="34" charset="-120"/>
+              </a:rPr>
+              <a:t>None of it is written down in a way the next programme can use, so the work is repeated.</a:t>
             </a:r>
             <a:endParaRPr lang="en-US" sz="820" dirty="0"/>
           </a:p>
@@ -1393,12 +1465,12 @@
         </p:nvSpPr>
         <p:spPr>
           <a:xfrm>
-            <a:off x="228600" y="3383280"/>
-            <a:ext cx="5989320" cy="3246120"/>
+            <a:off x="228600" y="4142232"/>
+            <a:ext cx="5989320" cy="2487168"/>
           </a:xfrm>
           <a:prstGeom prst="roundRect">
             <a:avLst>
-              <a:gd name="adj" fmla="val 2535"/>
+              <a:gd name="adj" fmla="val 3309"/>
             </a:avLst>
           </a:prstGeom>
           <a:solidFill>
@@ -1420,7 +1492,7 @@
         </p:nvSpPr>
         <p:spPr>
           <a:xfrm>
-            <a:off x="438912" y="3474720"/>
+            <a:off x="438912" y="4233672"/>
             <a:ext cx="3108960" cy="219456"/>
           </a:xfrm>
           <a:prstGeom prst="rect">
@@ -1459,8 +1531,8 @@
         </p:nvSpPr>
         <p:spPr>
           <a:xfrm>
-            <a:off x="438912" y="3749040"/>
-            <a:ext cx="5568696" cy="1005840"/>
+            <a:off x="438912" y="4489704"/>
+            <a:ext cx="5568696" cy="2112264"/>
           </a:xfrm>
           <a:prstGeom prst="rect">
             <a:avLst/>
@@ -1491,7 +1563,7 @@
                 <a:ea typeface="Arial" pitchFamily="34" charset="-122"/>
                 <a:cs typeface="Arial" pitchFamily="34" charset="-120"/>
               </a:rPr>
-              <a:t>Upload the 3D CAD and the 2D drawings. Geometry, material, tolerances and finishes are read automatically, and ideas come back at assembly, sub-assembly, part and technology level.</a:t>
+              <a:t>Upload the 3D CAD and the 2D drawings for a part or an assembly. The geometry, material, tolerances and finishes are read from the files — nobody types them in.</a:t>
             </a:r>
             <a:endParaRPr lang="en-US" sz="820" dirty="0"/>
           </a:p>
@@ -1515,7 +1587,7 @@
                 <a:ea typeface="Arial" pitchFamily="34" charset="-122"/>
                 <a:cs typeface="Arial" pitchFamily="34" charset="-120"/>
               </a:rPr>
-              <a:t>Ideas cover lower-cost design with benchmark references, alternative materials and manufacturing processes, part and fastener consolidation, tolerance and finish relaxation, and genuinely novel concepts.</a:t>
+              <a:t>Should-Cost builds the piece price from the bottom up: material, cycle time, tooling and overhead. Every idea is then measured against that number instead of against an opinion.</a:t>
             </a:r>
             <a:endParaRPr lang="en-US" sz="820" dirty="0"/>
           </a:p>
@@ -1539,7 +1611,7 @@
                 <a:ea typeface="Arial" pitchFamily="34" charset="-122"/>
                 <a:cs typeface="Arial" pitchFamily="34" charset="-120"/>
               </a:rPr>
-              <a:t>Every idea is priced by a deterministic cost engine and labelled confirmed, contradicted, or not verifiable with the reason. The AI proposes and explains; it never invents a number.</a:t>
+              <a:t>Prism takes one part and shows where its price really sits — what the design costs, what the specification costs, what the chosen process costs and what the sourcing location costs. That tells you which line of a supplier quote to argue with.</a:t>
             </a:r>
             <a:endParaRPr lang="en-US" sz="820" dirty="0"/>
           </a:p>
@@ -1563,966 +1635,122 @@
                 <a:ea typeface="Arial" pitchFamily="34" charset="-122"/>
                 <a:cs typeface="Arial" pitchFamily="34" charset="-120"/>
               </a:rPr>
-              <a:t>All automotive commodities: BIW, chassis, powertrain, e-drive, battery, thermal, interior, exterior, electrical / electronic, harness.</a:t>
+              <a:t>DFM / DFA Studio reads the model and points out what will be awkward or expensive to make and assemble — thin walls, undercuts, missing draft, too many fasteners — while the design can still be changed.</a:t>
             </a:r>
             <a:endParaRPr lang="en-US" sz="820" dirty="0"/>
           </a:p>
+          <a:p>
+            <a:pPr marL="342900" indent="-342900">
+              <a:lnSpc>
+                <a:spcPct val="95000"/>
+              </a:lnSpc>
+              <a:spcAft>
+                <a:spcPts val="100"/>
+              </a:spcAft>
+              <a:buSzPct val="100000"/>
+              <a:buChar char="•"/>
+            </a:pPr>
+            <a:r>
+              <a:rPr lang="en-US" sz="820" dirty="0">
+                <a:solidFill>
+                  <a:srgbClr val="1F2328"/>
+                </a:solidFill>
+                <a:latin typeface="Arial" pitchFamily="34" charset="0"/>
+                <a:ea typeface="Arial" pitchFamily="34" charset="-122"/>
+                <a:cs typeface="Arial" pitchFamily="34" charset="-120"/>
+              </a:rPr>
+              <a:t>Innovation Studio and TRIZ Studio do the idea generation itself: eight structured value engineering methods, plus a method for breaking a cost-versus-performance trade-off rather than accepting it.</a:t>
+            </a:r>
+            <a:endParaRPr lang="en-US" sz="820" dirty="0"/>
+          </a:p>
+          <a:p>
+            <a:pPr marL="342900" indent="-342900">
+              <a:lnSpc>
+                <a:spcPct val="95000"/>
+              </a:lnSpc>
+              <a:spcAft>
+                <a:spcPts val="100"/>
+              </a:spcAft>
+              <a:buSzPct val="100000"/>
+              <a:buChar char="•"/>
+            </a:pPr>
+            <a:r>
+              <a:rPr lang="en-US" sz="820" dirty="0">
+                <a:solidFill>
+                  <a:srgbClr val="1F2328"/>
+                </a:solidFill>
+                <a:latin typeface="Arial" pitchFamily="34" charset="0"/>
+                <a:ea typeface="Arial" pitchFamily="34" charset="-122"/>
+                <a:cs typeface="Arial" pitchFamily="34" charset="-120"/>
+              </a:rPr>
+              <a:t>Horizon looks a few years out, so a decision taken now is not overtaken by where the technology is going.</a:t>
+            </a:r>
+            <a:endParaRPr lang="en-US" sz="820" dirty="0"/>
+          </a:p>
+          <a:p>
+            <a:pPr marL="342900" indent="-342900">
+              <a:lnSpc>
+                <a:spcPct val="95000"/>
+              </a:lnSpc>
+              <a:spcAft>
+                <a:spcPts val="100"/>
+              </a:spcAft>
+              <a:buSzPct val="100000"/>
+              <a:buChar char="•"/>
+            </a:pPr>
+            <a:r>
+              <a:rPr lang="en-US" sz="820" dirty="0">
+                <a:solidFill>
+                  <a:srgbClr val="1F2328"/>
+                </a:solidFill>
+                <a:latin typeface="Arial" pitchFamily="34" charset="0"/>
+                <a:ea typeface="Arial" pitchFamily="34" charset="-122"/>
+                <a:cs typeface="Arial" pitchFamily="34" charset="-120"/>
+              </a:rPr>
+              <a:t>Ideas come back at four levels — whole assembly, sub-assembly, single part, and the technology itself — each naming the change, the process, the material and what it saves per part, across every commodity from BIW and chassis to battery, interior and harness.</a:t>
+            </a:r>
+            <a:endParaRPr lang="en-US" sz="820" dirty="0"/>
+          </a:p>
+          <a:p>
+            <a:pPr marL="342900" indent="-342900">
+              <a:lnSpc>
+                <a:spcPct val="95000"/>
+              </a:lnSpc>
+              <a:spcAft>
+                <a:spcPts val="100"/>
+              </a:spcAft>
+              <a:buSzPct val="100000"/>
+              <a:buChar char="•"/>
+            </a:pPr>
+            <a:r>
+              <a:rPr lang="en-US" sz="820" dirty="0">
+                <a:solidFill>
+                  <a:srgbClr val="1F2328"/>
+                </a:solidFill>
+                <a:latin typeface="Arial" pitchFamily="34" charset="0"/>
+                <a:ea typeface="Arial" pitchFamily="34" charset="-122"/>
+                <a:cs typeface="Arial" pitchFamily="34" charset="-120"/>
+              </a:rPr>
+              <a:t>The AI writes the idea and the explanation. The saving is always calculated by the cost engine, and every idea says whether the engine confirmed it, contradicted it, or could not check it and why.</a:t>
+            </a:r>
+            <a:endParaRPr lang="en-US" sz="820" dirty="0"/>
+          </a:p>
         </p:txBody>
       </p:sp>
       <p:sp>
         <p:nvSpPr>
-          <p:cNvPr id="15" name="Text 13"/>
-          <p:cNvSpPr txBox="1"/>
-          <p:nvPr/>
-        </p:nvSpPr>
-        <p:spPr>
-          <a:xfrm>
-            <a:off x="438912" y="4828032"/>
-            <a:ext cx="2743200" cy="182880"/>
-          </a:xfrm>
-          <a:prstGeom prst="rect">
-            <a:avLst/>
-          </a:prstGeom>
-          <a:noFill/>
-          <a:ln/>
-        </p:spPr>
-        <p:txBody>
-          <a:bodyPr wrap="square" lIns="0" tIns="0" rIns="0" bIns="0" rtlCol="0" anchor="ctr"/>
-          <a:lstStyle/>
-          <a:p>
-            <a:pPr indent="0" marL="0">
-              <a:buNone/>
-            </a:pPr>
-            <a:r>
-              <a:rPr lang="en-US" sz="850" b="1" dirty="0">
-                <a:solidFill>
-                  <a:srgbClr val="1F2328"/>
-                </a:solidFill>
-                <a:latin typeface="Arial" pitchFamily="34" charset="0"/>
-                <a:ea typeface="Arial" pitchFamily="34" charset="-122"/>
-                <a:cs typeface="Arial" pitchFamily="34" charset="-120"/>
-              </a:rPr>
-              <a:t>17 tools built and working</a:t>
-            </a:r>
-            <a:endParaRPr lang="en-US" sz="850" dirty="0"/>
-          </a:p>
-        </p:txBody>
-      </p:sp>
-      <p:sp>
-        <p:nvSpPr>
-          <p:cNvPr id="16" name="Text 14"/>
-          <p:cNvSpPr txBox="1"/>
-          <p:nvPr/>
-        </p:nvSpPr>
-        <p:spPr>
-          <a:xfrm>
-            <a:off x="438912" y="5065776"/>
-            <a:ext cx="2761488" cy="164592"/>
-          </a:xfrm>
-          <a:prstGeom prst="rect">
-            <a:avLst/>
-          </a:prstGeom>
-          <a:noFill/>
-          <a:ln/>
-        </p:spPr>
-        <p:txBody>
-          <a:bodyPr wrap="square" lIns="0" tIns="0" rIns="0" bIns="0" rtlCol="0" anchor="ctr"/>
-          <a:lstStyle/>
-          <a:p>
-            <a:pPr indent="0" marL="0">
-              <a:buNone/>
-            </a:pPr>
-            <a:r>
-              <a:rPr lang="en-US" sz="740" b="1" dirty="0">
-                <a:solidFill>
-                  <a:srgbClr val="1F2328"/>
-                </a:solidFill>
-                <a:latin typeface="Arial" pitchFamily="34" charset="0"/>
-                <a:ea typeface="Arial" pitchFamily="34" charset="-122"/>
-                <a:cs typeface="Arial" pitchFamily="34" charset="-120"/>
-              </a:rPr>
-              <a:t>Analyze</a:t>
-            </a:r>
-            <a:pPr indent="0" marL="0">
-              <a:buNone/>
-            </a:pPr>
-            <a:r>
-              <a:rPr lang="en-US" sz="740" dirty="0">
-                <a:solidFill>
-                  <a:srgbClr val="5B6570"/>
-                </a:solidFill>
-                <a:latin typeface="Arial" pitchFamily="34" charset="0"/>
-                <a:ea typeface="Arial" pitchFamily="34" charset="-122"/>
-                <a:cs typeface="Arial" pitchFamily="34" charset="-120"/>
-              </a:rPr>
-              <a:t>  Costed ideas for any vehicle system</a:t>
-            </a:r>
-            <a:endParaRPr lang="en-US" sz="740" dirty="0"/>
-          </a:p>
-        </p:txBody>
-      </p:sp>
-      <p:sp>
-        <p:nvSpPr>
-          <p:cNvPr id="17" name="Text 15"/>
-          <p:cNvSpPr txBox="1"/>
-          <p:nvPr/>
-        </p:nvSpPr>
-        <p:spPr>
-          <a:xfrm>
-            <a:off x="438912" y="5234940"/>
-            <a:ext cx="2761488" cy="164592"/>
-          </a:xfrm>
-          <a:prstGeom prst="rect">
-            <a:avLst/>
-          </a:prstGeom>
-          <a:noFill/>
-          <a:ln/>
-        </p:spPr>
-        <p:txBody>
-          <a:bodyPr wrap="square" lIns="0" tIns="0" rIns="0" bIns="0" rtlCol="0" anchor="ctr"/>
-          <a:lstStyle/>
-          <a:p>
-            <a:pPr indent="0" marL="0">
-              <a:buNone/>
-            </a:pPr>
-            <a:r>
-              <a:rPr lang="en-US" sz="740" b="1" dirty="0">
-                <a:solidFill>
-                  <a:srgbClr val="1F2328"/>
-                </a:solidFill>
-                <a:latin typeface="Arial" pitchFamily="34" charset="0"/>
-                <a:ea typeface="Arial" pitchFamily="34" charset="-122"/>
-                <a:cs typeface="Arial" pitchFamily="34" charset="-120"/>
-              </a:rPr>
-              <a:t>Innovation Studio</a:t>
-            </a:r>
-            <a:pPr indent="0" marL="0">
-              <a:buNone/>
-            </a:pPr>
-            <a:r>
-              <a:rPr lang="en-US" sz="740" dirty="0">
-                <a:solidFill>
-                  <a:srgbClr val="5B6570"/>
-                </a:solidFill>
-                <a:latin typeface="Arial" pitchFamily="34" charset="0"/>
-                <a:ea typeface="Arial" pitchFamily="34" charset="-122"/>
-                <a:cs typeface="Arial" pitchFamily="34" charset="-120"/>
-              </a:rPr>
-              <a:t>  Eight VA/VE methods, every idea priced</a:t>
-            </a:r>
-            <a:endParaRPr lang="en-US" sz="740" dirty="0"/>
-          </a:p>
-        </p:txBody>
-      </p:sp>
-      <p:sp>
-        <p:nvSpPr>
-          <p:cNvPr id="18" name="Text 16"/>
-          <p:cNvSpPr txBox="1"/>
-          <p:nvPr/>
-        </p:nvSpPr>
-        <p:spPr>
-          <a:xfrm>
-            <a:off x="438912" y="5404104"/>
-            <a:ext cx="2761488" cy="164592"/>
-          </a:xfrm>
-          <a:prstGeom prst="rect">
-            <a:avLst/>
-          </a:prstGeom>
-          <a:noFill/>
-          <a:ln/>
-        </p:spPr>
-        <p:txBody>
-          <a:bodyPr wrap="square" lIns="0" tIns="0" rIns="0" bIns="0" rtlCol="0" anchor="ctr"/>
-          <a:lstStyle/>
-          <a:p>
-            <a:pPr indent="0" marL="0">
-              <a:buNone/>
-            </a:pPr>
-            <a:r>
-              <a:rPr lang="en-US" sz="740" b="1" dirty="0">
-                <a:solidFill>
-                  <a:srgbClr val="1F2328"/>
-                </a:solidFill>
-                <a:latin typeface="Arial" pitchFamily="34" charset="0"/>
-                <a:ea typeface="Arial" pitchFamily="34" charset="-122"/>
-                <a:cs typeface="Arial" pitchFamily="34" charset="-120"/>
-              </a:rPr>
-              <a:t>TRIZ Studio</a:t>
-            </a:r>
-            <a:pPr indent="0" marL="0">
-              <a:buNone/>
-            </a:pPr>
-            <a:r>
-              <a:rPr lang="en-US" sz="740" dirty="0">
-                <a:solidFill>
-                  <a:srgbClr val="5B6570"/>
-                </a:solidFill>
-                <a:latin typeface="Arial" pitchFamily="34" charset="0"/>
-                <a:ea typeface="Arial" pitchFamily="34" charset="-122"/>
-                <a:cs typeface="Arial" pitchFamily="34" charset="-120"/>
-              </a:rPr>
-              <a:t>  Breaks cost-versus-performance trade-offs</a:t>
-            </a:r>
-            <a:endParaRPr lang="en-US" sz="740" dirty="0"/>
-          </a:p>
-        </p:txBody>
-      </p:sp>
-      <p:sp>
-        <p:nvSpPr>
-          <p:cNvPr id="19" name="Text 17"/>
-          <p:cNvSpPr txBox="1"/>
-          <p:nvPr/>
-        </p:nvSpPr>
-        <p:spPr>
-          <a:xfrm>
-            <a:off x="438912" y="5573268"/>
-            <a:ext cx="2761488" cy="164592"/>
-          </a:xfrm>
-          <a:prstGeom prst="rect">
-            <a:avLst/>
-          </a:prstGeom>
-          <a:noFill/>
-          <a:ln/>
-        </p:spPr>
-        <p:txBody>
-          <a:bodyPr wrap="square" lIns="0" tIns="0" rIns="0" bIns="0" rtlCol="0" anchor="ctr"/>
-          <a:lstStyle/>
-          <a:p>
-            <a:pPr indent="0" marL="0">
-              <a:buNone/>
-            </a:pPr>
-            <a:r>
-              <a:rPr lang="en-US" sz="740" b="1" dirty="0">
-                <a:solidFill>
-                  <a:srgbClr val="1F2328"/>
-                </a:solidFill>
-                <a:latin typeface="Arial" pitchFamily="34" charset="0"/>
-                <a:ea typeface="Arial" pitchFamily="34" charset="-122"/>
-                <a:cs typeface="Arial" pitchFamily="34" charset="-120"/>
-              </a:rPr>
-              <a:t>Idea Studio</a:t>
-            </a:r>
-            <a:pPr indent="0" marL="0">
-              <a:buNone/>
-            </a:pPr>
-            <a:r>
-              <a:rPr lang="en-US" sz="740" dirty="0">
-                <a:solidFill>
-                  <a:srgbClr val="5B6570"/>
-                </a:solidFill>
-                <a:latin typeface="Arial" pitchFamily="34" charset="0"/>
-                <a:ea typeface="Arial" pitchFamily="34" charset="-122"/>
-                <a:cs typeface="Arial" pitchFamily="34" charset="-120"/>
-              </a:rPr>
-              <a:t>  Ideas from a part photo or CAD file</a:t>
-            </a:r>
-            <a:endParaRPr lang="en-US" sz="740" dirty="0"/>
-          </a:p>
-        </p:txBody>
-      </p:sp>
-      <p:sp>
-        <p:nvSpPr>
-          <p:cNvPr id="20" name="Text 18"/>
-          <p:cNvSpPr txBox="1"/>
-          <p:nvPr/>
-        </p:nvSpPr>
-        <p:spPr>
-          <a:xfrm>
-            <a:off x="438912" y="5742432"/>
-            <a:ext cx="2761488" cy="164592"/>
-          </a:xfrm>
-          <a:prstGeom prst="rect">
-            <a:avLst/>
-          </a:prstGeom>
-          <a:noFill/>
-          <a:ln/>
-        </p:spPr>
-        <p:txBody>
-          <a:bodyPr wrap="square" lIns="0" tIns="0" rIns="0" bIns="0" rtlCol="0" anchor="ctr"/>
-          <a:lstStyle/>
-          <a:p>
-            <a:pPr indent="0" marL="0">
-              <a:buNone/>
-            </a:pPr>
-            <a:r>
-              <a:rPr lang="en-US" sz="740" b="1" dirty="0">
-                <a:solidFill>
-                  <a:srgbClr val="1F2328"/>
-                </a:solidFill>
-                <a:latin typeface="Arial" pitchFamily="34" charset="0"/>
-                <a:ea typeface="Arial" pitchFamily="34" charset="-122"/>
-                <a:cs typeface="Arial" pitchFamily="34" charset="-120"/>
-              </a:rPr>
-              <a:t>CAD Diff</a:t>
-            </a:r>
-            <a:pPr indent="0" marL="0">
-              <a:buNone/>
-            </a:pPr>
-            <a:r>
-              <a:rPr lang="en-US" sz="740" dirty="0">
-                <a:solidFill>
-                  <a:srgbClr val="5B6570"/>
-                </a:solidFill>
-                <a:latin typeface="Arial" pitchFamily="34" charset="0"/>
-                <a:ea typeface="Arial" pitchFamily="34" charset="-122"/>
-                <a:cs typeface="Arial" pitchFamily="34" charset="-120"/>
-              </a:rPr>
-              <a:t>  The cost a design change added</a:t>
-            </a:r>
-            <a:endParaRPr lang="en-US" sz="740" dirty="0"/>
-          </a:p>
-        </p:txBody>
-      </p:sp>
-      <p:sp>
-        <p:nvSpPr>
-          <p:cNvPr id="21" name="Text 19"/>
-          <p:cNvSpPr txBox="1"/>
-          <p:nvPr/>
-        </p:nvSpPr>
-        <p:spPr>
-          <a:xfrm>
-            <a:off x="438912" y="5911596"/>
-            <a:ext cx="2761488" cy="164592"/>
-          </a:xfrm>
-          <a:prstGeom prst="rect">
-            <a:avLst/>
-          </a:prstGeom>
-          <a:noFill/>
-          <a:ln/>
-        </p:spPr>
-        <p:txBody>
-          <a:bodyPr wrap="square" lIns="0" tIns="0" rIns="0" bIns="0" rtlCol="0" anchor="ctr"/>
-          <a:lstStyle/>
-          <a:p>
-            <a:pPr indent="0" marL="0">
-              <a:buNone/>
-            </a:pPr>
-            <a:r>
-              <a:rPr lang="en-US" sz="740" b="1" dirty="0">
-                <a:solidFill>
-                  <a:srgbClr val="1F2328"/>
-                </a:solidFill>
-                <a:latin typeface="Arial" pitchFamily="34" charset="0"/>
-                <a:ea typeface="Arial" pitchFamily="34" charset="-122"/>
-                <a:cs typeface="Arial" pitchFamily="34" charset="-120"/>
-              </a:rPr>
-              <a:t>Prism</a:t>
-            </a:r>
-            <a:pPr indent="0" marL="0">
-              <a:buNone/>
-            </a:pPr>
-            <a:r>
-              <a:rPr lang="en-US" sz="740" dirty="0">
-                <a:solidFill>
-                  <a:srgbClr val="5B6570"/>
-                </a:solidFill>
-                <a:latin typeface="Arial" pitchFamily="34" charset="0"/>
-                <a:ea typeface="Arial" pitchFamily="34" charset="-122"/>
-                <a:cs typeface="Arial" pitchFamily="34" charset="-120"/>
-              </a:rPr>
-              <a:t>  Cost breakdown, quote gap, evidenced ideas</a:t>
-            </a:r>
-            <a:endParaRPr lang="en-US" sz="740" dirty="0"/>
-          </a:p>
-        </p:txBody>
-      </p:sp>
-      <p:sp>
-        <p:nvSpPr>
-          <p:cNvPr id="22" name="Text 20"/>
-          <p:cNvSpPr txBox="1"/>
-          <p:nvPr/>
-        </p:nvSpPr>
-        <p:spPr>
-          <a:xfrm>
-            <a:off x="438912" y="6080760"/>
-            <a:ext cx="2761488" cy="164592"/>
-          </a:xfrm>
-          <a:prstGeom prst="rect">
-            <a:avLst/>
-          </a:prstGeom>
-          <a:noFill/>
-          <a:ln/>
-        </p:spPr>
-        <p:txBody>
-          <a:bodyPr wrap="square" lIns="0" tIns="0" rIns="0" bIns="0" rtlCol="0" anchor="ctr"/>
-          <a:lstStyle/>
-          <a:p>
-            <a:pPr indent="0" marL="0">
-              <a:buNone/>
-            </a:pPr>
-            <a:r>
-              <a:rPr lang="en-US" sz="740" b="1" dirty="0">
-                <a:solidFill>
-                  <a:srgbClr val="1F2328"/>
-                </a:solidFill>
-                <a:latin typeface="Arial" pitchFamily="34" charset="0"/>
-                <a:ea typeface="Arial" pitchFamily="34" charset="-122"/>
-                <a:cs typeface="Arial" pitchFamily="34" charset="-120"/>
-              </a:rPr>
-              <a:t>Should-Cost</a:t>
-            </a:r>
-            <a:pPr indent="0" marL="0">
-              <a:buNone/>
-            </a:pPr>
-            <a:r>
-              <a:rPr lang="en-US" sz="740" dirty="0">
-                <a:solidFill>
-                  <a:srgbClr val="5B6570"/>
-                </a:solidFill>
-                <a:latin typeface="Arial" pitchFamily="34" charset="0"/>
-                <a:ea typeface="Arial" pitchFamily="34" charset="-122"/>
-                <a:cs typeface="Arial" pitchFamily="34" charset="-120"/>
-              </a:rPr>
-              <a:t>  Bottom-up piece price from first principles</a:t>
-            </a:r>
-            <a:endParaRPr lang="en-US" sz="740" dirty="0"/>
-          </a:p>
-        </p:txBody>
-      </p:sp>
-      <p:sp>
-        <p:nvSpPr>
-          <p:cNvPr id="23" name="Text 21"/>
-          <p:cNvSpPr txBox="1"/>
-          <p:nvPr/>
-        </p:nvSpPr>
-        <p:spPr>
-          <a:xfrm>
-            <a:off x="438912" y="6249924"/>
-            <a:ext cx="2761488" cy="164592"/>
-          </a:xfrm>
-          <a:prstGeom prst="rect">
-            <a:avLst/>
-          </a:prstGeom>
-          <a:noFill/>
-          <a:ln/>
-        </p:spPr>
-        <p:txBody>
-          <a:bodyPr wrap="square" lIns="0" tIns="0" rIns="0" bIns="0" rtlCol="0" anchor="ctr"/>
-          <a:lstStyle/>
-          <a:p>
-            <a:pPr indent="0" marL="0">
-              <a:buNone/>
-            </a:pPr>
-            <a:r>
-              <a:rPr lang="en-US" sz="740" b="1" dirty="0">
-                <a:solidFill>
-                  <a:srgbClr val="1F2328"/>
-                </a:solidFill>
-                <a:latin typeface="Arial" pitchFamily="34" charset="0"/>
-                <a:ea typeface="Arial" pitchFamily="34" charset="-122"/>
-                <a:cs typeface="Arial" pitchFamily="34" charset="-120"/>
-              </a:rPr>
-              <a:t>CAD → Cost</a:t>
-            </a:r>
-            <a:pPr indent="0" marL="0">
-              <a:buNone/>
-            </a:pPr>
-            <a:r>
-              <a:rPr lang="en-US" sz="740" dirty="0">
-                <a:solidFill>
-                  <a:srgbClr val="5B6570"/>
-                </a:solidFill>
-                <a:latin typeface="Arial" pitchFamily="34" charset="0"/>
-                <a:ea typeface="Arial" pitchFamily="34" charset="-122"/>
-                <a:cs typeface="Arial" pitchFamily="34" charset="-120"/>
-              </a:rPr>
-              <a:t>  Cost driven by the geometry itself</a:t>
-            </a:r>
-            <a:endParaRPr lang="en-US" sz="740" dirty="0"/>
-          </a:p>
-        </p:txBody>
-      </p:sp>
-      <p:sp>
-        <p:nvSpPr>
-          <p:cNvPr id="24" name="Text 22"/>
-          <p:cNvSpPr txBox="1"/>
-          <p:nvPr/>
-        </p:nvSpPr>
-        <p:spPr>
-          <a:xfrm>
-            <a:off x="438912" y="6419088"/>
-            <a:ext cx="2761488" cy="164592"/>
-          </a:xfrm>
-          <a:prstGeom prst="rect">
-            <a:avLst/>
-          </a:prstGeom>
-          <a:noFill/>
-          <a:ln/>
-        </p:spPr>
-        <p:txBody>
-          <a:bodyPr wrap="square" lIns="0" tIns="0" rIns="0" bIns="0" rtlCol="0" anchor="ctr"/>
-          <a:lstStyle/>
-          <a:p>
-            <a:pPr indent="0" marL="0">
-              <a:buNone/>
-            </a:pPr>
-            <a:r>
-              <a:rPr lang="en-US" sz="740" b="1" dirty="0">
-                <a:solidFill>
-                  <a:srgbClr val="1F2328"/>
-                </a:solidFill>
-                <a:latin typeface="Arial" pitchFamily="34" charset="0"/>
-                <a:ea typeface="Arial" pitchFamily="34" charset="-122"/>
-                <a:cs typeface="Arial" pitchFamily="34" charset="-120"/>
-              </a:rPr>
-              <a:t>PCB → BOM → Cost</a:t>
-            </a:r>
-            <a:pPr indent="0" marL="0">
-              <a:buNone/>
-            </a:pPr>
-            <a:r>
-              <a:rPr lang="en-US" sz="740" dirty="0">
-                <a:solidFill>
-                  <a:srgbClr val="5B6570"/>
-                </a:solidFill>
-                <a:latin typeface="Arial" pitchFamily="34" charset="0"/>
-                <a:ea typeface="Arial" pitchFamily="34" charset="-122"/>
-                <a:cs typeface="Arial" pitchFamily="34" charset="-120"/>
-              </a:rPr>
-              <a:t>  Board image to BOM to cost</a:t>
-            </a:r>
-            <a:endParaRPr lang="en-US" sz="740" dirty="0"/>
-          </a:p>
-        </p:txBody>
-      </p:sp>
-      <p:sp>
-        <p:nvSpPr>
-          <p:cNvPr id="25" name="Text 23"/>
-          <p:cNvSpPr txBox="1"/>
-          <p:nvPr/>
-        </p:nvSpPr>
-        <p:spPr>
-          <a:xfrm>
-            <a:off x="3355848" y="5065776"/>
-            <a:ext cx="2761488" cy="164592"/>
-          </a:xfrm>
-          <a:prstGeom prst="rect">
-            <a:avLst/>
-          </a:prstGeom>
-          <a:noFill/>
-          <a:ln/>
-        </p:spPr>
-        <p:txBody>
-          <a:bodyPr wrap="square" lIns="0" tIns="0" rIns="0" bIns="0" rtlCol="0" anchor="ctr"/>
-          <a:lstStyle/>
-          <a:p>
-            <a:pPr indent="0" marL="0">
-              <a:buNone/>
-            </a:pPr>
-            <a:r>
-              <a:rPr lang="en-US" sz="740" b="1" dirty="0">
-                <a:solidFill>
-                  <a:srgbClr val="1F2328"/>
-                </a:solidFill>
-                <a:latin typeface="Arial" pitchFamily="34" charset="0"/>
-                <a:ea typeface="Arial" pitchFamily="34" charset="-122"/>
-                <a:cs typeface="Arial" pitchFamily="34" charset="-120"/>
-              </a:rPr>
-              <a:t>BOM Batch</a:t>
-            </a:r>
-            <a:pPr indent="0" marL="0">
-              <a:buNone/>
-            </a:pPr>
-            <a:r>
-              <a:rPr lang="en-US" sz="740" dirty="0">
-                <a:solidFill>
-                  <a:srgbClr val="5B6570"/>
-                </a:solidFill>
-                <a:latin typeface="Arial" pitchFamily="34" charset="0"/>
-                <a:ea typeface="Arial" pitchFamily="34" charset="-122"/>
-                <a:cs typeface="Arial" pitchFamily="34" charset="-120"/>
-              </a:rPr>
-              <a:t>  Prices a whole BOM in one run</a:t>
-            </a:r>
-            <a:endParaRPr lang="en-US" sz="740" dirty="0"/>
-          </a:p>
-        </p:txBody>
-      </p:sp>
-      <p:sp>
-        <p:nvSpPr>
-          <p:cNvPr id="26" name="Text 24"/>
-          <p:cNvSpPr txBox="1"/>
-          <p:nvPr/>
-        </p:nvSpPr>
-        <p:spPr>
-          <a:xfrm>
-            <a:off x="3355848" y="5234940"/>
-            <a:ext cx="2761488" cy="164592"/>
-          </a:xfrm>
-          <a:prstGeom prst="rect">
-            <a:avLst/>
-          </a:prstGeom>
-          <a:noFill/>
-          <a:ln/>
-        </p:spPr>
-        <p:txBody>
-          <a:bodyPr wrap="square" lIns="0" tIns="0" rIns="0" bIns="0" rtlCol="0" anchor="ctr"/>
-          <a:lstStyle/>
-          <a:p>
-            <a:pPr indent="0" marL="0">
-              <a:buNone/>
-            </a:pPr>
-            <a:r>
-              <a:rPr lang="en-US" sz="740" b="1" dirty="0">
-                <a:solidFill>
-                  <a:srgbClr val="1F2328"/>
-                </a:solidFill>
-                <a:latin typeface="Arial" pitchFamily="34" charset="0"/>
-                <a:ea typeface="Arial" pitchFamily="34" charset="-122"/>
-                <a:cs typeface="Arial" pitchFamily="34" charset="-120"/>
-              </a:rPr>
-              <a:t>DFM / DFA Studio</a:t>
-            </a:r>
-            <a:pPr indent="0" marL="0">
-              <a:buNone/>
-            </a:pPr>
-            <a:r>
-              <a:rPr lang="en-US" sz="740" dirty="0">
-                <a:solidFill>
-                  <a:srgbClr val="5B6570"/>
-                </a:solidFill>
-                <a:latin typeface="Arial" pitchFamily="34" charset="0"/>
-                <a:ea typeface="Arial" pitchFamily="34" charset="-122"/>
-                <a:cs typeface="Arial" pitchFamily="34" charset="-120"/>
-              </a:rPr>
-              <a:t>  Catches build problems early</a:t>
-            </a:r>
-            <a:endParaRPr lang="en-US" sz="740" dirty="0"/>
-          </a:p>
-        </p:txBody>
-      </p:sp>
-      <p:sp>
-        <p:nvSpPr>
-          <p:cNvPr id="27" name="Text 25"/>
-          <p:cNvSpPr txBox="1"/>
-          <p:nvPr/>
-        </p:nvSpPr>
-        <p:spPr>
-          <a:xfrm>
-            <a:off x="3355848" y="5404104"/>
-            <a:ext cx="2761488" cy="164592"/>
-          </a:xfrm>
-          <a:prstGeom prst="rect">
-            <a:avLst/>
-          </a:prstGeom>
-          <a:noFill/>
-          <a:ln/>
-        </p:spPr>
-        <p:txBody>
-          <a:bodyPr wrap="square" lIns="0" tIns="0" rIns="0" bIns="0" rtlCol="0" anchor="ctr"/>
-          <a:lstStyle/>
-          <a:p>
-            <a:pPr indent="0" marL="0">
-              <a:buNone/>
-            </a:pPr>
-            <a:r>
-              <a:rPr lang="en-US" sz="740" b="1" dirty="0">
-                <a:solidFill>
-                  <a:srgbClr val="1F2328"/>
-                </a:solidFill>
-                <a:latin typeface="Arial" pitchFamily="34" charset="0"/>
-                <a:ea typeface="Arial" pitchFamily="34" charset="-122"/>
-                <a:cs typeface="Arial" pitchFamily="34" charset="-120"/>
-              </a:rPr>
-              <a:t>Wiring Harness</a:t>
-            </a:r>
-            <a:pPr indent="0" marL="0">
-              <a:buNone/>
-            </a:pPr>
-            <a:r>
-              <a:rPr lang="en-US" sz="740" dirty="0">
-                <a:solidFill>
-                  <a:srgbClr val="5B6570"/>
-                </a:solidFill>
-                <a:latin typeface="Arial" pitchFamily="34" charset="0"/>
-                <a:ea typeface="Arial" pitchFamily="34" charset="-122"/>
-                <a:cs typeface="Arial" pitchFamily="34" charset="-120"/>
-              </a:rPr>
-              <a:t>  Copper, connectors and assembly minutes</a:t>
-            </a:r>
-            <a:endParaRPr lang="en-US" sz="740" dirty="0"/>
-          </a:p>
-        </p:txBody>
-      </p:sp>
-      <p:sp>
-        <p:nvSpPr>
-          <p:cNvPr id="28" name="Text 26"/>
-          <p:cNvSpPr txBox="1"/>
-          <p:nvPr/>
-        </p:nvSpPr>
-        <p:spPr>
-          <a:xfrm>
-            <a:off x="3355848" y="5573268"/>
-            <a:ext cx="2761488" cy="164592"/>
-          </a:xfrm>
-          <a:prstGeom prst="rect">
-            <a:avLst/>
-          </a:prstGeom>
-          <a:noFill/>
-          <a:ln/>
-        </p:spPr>
-        <p:txBody>
-          <a:bodyPr wrap="square" lIns="0" tIns="0" rIns="0" bIns="0" rtlCol="0" anchor="ctr"/>
-          <a:lstStyle/>
-          <a:p>
-            <a:pPr indent="0" marL="0">
-              <a:buNone/>
-            </a:pPr>
-            <a:r>
-              <a:rPr lang="en-US" sz="740" b="1" dirty="0">
-                <a:solidFill>
-                  <a:srgbClr val="1F2328"/>
-                </a:solidFill>
-                <a:latin typeface="Arial" pitchFamily="34" charset="0"/>
-                <a:ea typeface="Arial" pitchFamily="34" charset="-122"/>
-                <a:cs typeface="Arial" pitchFamily="34" charset="-120"/>
-              </a:rPr>
-              <a:t>Pipeline</a:t>
-            </a:r>
-            <a:pPr indent="0" marL="0">
-              <a:buNone/>
-            </a:pPr>
-            <a:r>
-              <a:rPr lang="en-US" sz="740" dirty="0">
-                <a:solidFill>
-                  <a:srgbClr val="5B6570"/>
-                </a:solidFill>
-                <a:latin typeface="Arial" pitchFamily="34" charset="0"/>
-                <a:ea typeface="Arial" pitchFamily="34" charset="-122"/>
-                <a:cs typeface="Arial" pitchFamily="34" charset="-120"/>
-              </a:rPr>
-              <a:t>  Idea to confirmed saving, tracked</a:t>
-            </a:r>
-            <a:endParaRPr lang="en-US" sz="740" dirty="0"/>
-          </a:p>
-        </p:txBody>
-      </p:sp>
-      <p:sp>
-        <p:nvSpPr>
-          <p:cNvPr id="29" name="Text 27"/>
-          <p:cNvSpPr txBox="1"/>
-          <p:nvPr/>
-        </p:nvSpPr>
-        <p:spPr>
-          <a:xfrm>
-            <a:off x="3355848" y="5742432"/>
-            <a:ext cx="2761488" cy="164592"/>
-          </a:xfrm>
-          <a:prstGeom prst="rect">
-            <a:avLst/>
-          </a:prstGeom>
-          <a:noFill/>
-          <a:ln/>
-        </p:spPr>
-        <p:txBody>
-          <a:bodyPr wrap="square" lIns="0" tIns="0" rIns="0" bIns="0" rtlCol="0" anchor="ctr"/>
-          <a:lstStyle/>
-          <a:p>
-            <a:pPr indent="0" marL="0">
-              <a:buNone/>
-            </a:pPr>
-            <a:r>
-              <a:rPr lang="en-US" sz="740" b="1" dirty="0">
-                <a:solidFill>
-                  <a:srgbClr val="1F2328"/>
-                </a:solidFill>
-                <a:latin typeface="Arial" pitchFamily="34" charset="0"/>
-                <a:ea typeface="Arial" pitchFamily="34" charset="-122"/>
-                <a:cs typeface="Arial" pitchFamily="34" charset="-120"/>
-              </a:rPr>
-              <a:t>VAVE Tracker</a:t>
-            </a:r>
-            <a:pPr indent="0" marL="0">
-              <a:buNone/>
-            </a:pPr>
-            <a:r>
-              <a:rPr lang="en-US" sz="740" dirty="0">
-                <a:solidFill>
-                  <a:srgbClr val="5B6570"/>
-                </a:solidFill>
-                <a:latin typeface="Arial" pitchFamily="34" charset="0"/>
-                <a:ea typeface="Arial" pitchFamily="34" charset="-122"/>
-                <a:cs typeface="Arial" pitchFamily="34" charset="-120"/>
-              </a:rPr>
-              <a:t>  Approved ideas driven to implementation</a:t>
-            </a:r>
-            <a:endParaRPr lang="en-US" sz="740" dirty="0"/>
-          </a:p>
-        </p:txBody>
-      </p:sp>
-      <p:sp>
-        <p:nvSpPr>
-          <p:cNvPr id="30" name="Text 28"/>
-          <p:cNvSpPr txBox="1"/>
-          <p:nvPr/>
-        </p:nvSpPr>
-        <p:spPr>
-          <a:xfrm>
-            <a:off x="3355848" y="5911596"/>
-            <a:ext cx="2761488" cy="164592"/>
-          </a:xfrm>
-          <a:prstGeom prst="rect">
-            <a:avLst/>
-          </a:prstGeom>
-          <a:noFill/>
-          <a:ln/>
-        </p:spPr>
-        <p:txBody>
-          <a:bodyPr wrap="square" lIns="0" tIns="0" rIns="0" bIns="0" rtlCol="0" anchor="ctr"/>
-          <a:lstStyle/>
-          <a:p>
-            <a:pPr indent="0" marL="0">
-              <a:buNone/>
-            </a:pPr>
-            <a:r>
-              <a:rPr lang="en-US" sz="740" b="1" dirty="0">
-                <a:solidFill>
-                  <a:srgbClr val="1F2328"/>
-                </a:solidFill>
-                <a:latin typeface="Arial" pitchFamily="34" charset="0"/>
-                <a:ea typeface="Arial" pitchFamily="34" charset="-122"/>
-                <a:cs typeface="Arial" pitchFamily="34" charset="-120"/>
-              </a:rPr>
-              <a:t>Idea Marketplace</a:t>
-            </a:r>
-            <a:pPr indent="0" marL="0">
-              <a:buNone/>
-            </a:pPr>
-            <a:r>
-              <a:rPr lang="en-US" sz="740" dirty="0">
-                <a:solidFill>
-                  <a:srgbClr val="5B6570"/>
-                </a:solidFill>
-                <a:latin typeface="Arial" pitchFamily="34" charset="0"/>
-                <a:ea typeface="Arial" pitchFamily="34" charset="-122"/>
-                <a:cs typeface="Arial" pitchFamily="34" charset="-120"/>
-              </a:rPr>
-              <a:t>  Reusable library of proven ideas</a:t>
-            </a:r>
-            <a:endParaRPr lang="en-US" sz="740" dirty="0"/>
-          </a:p>
-        </p:txBody>
-      </p:sp>
-      <p:sp>
-        <p:nvSpPr>
-          <p:cNvPr id="31" name="Text 29"/>
-          <p:cNvSpPr txBox="1"/>
-          <p:nvPr/>
-        </p:nvSpPr>
-        <p:spPr>
-          <a:xfrm>
-            <a:off x="3355848" y="6080760"/>
-            <a:ext cx="2761488" cy="164592"/>
-          </a:xfrm>
-          <a:prstGeom prst="rect">
-            <a:avLst/>
-          </a:prstGeom>
-          <a:noFill/>
-          <a:ln/>
-        </p:spPr>
-        <p:txBody>
-          <a:bodyPr wrap="square" lIns="0" tIns="0" rIns="0" bIns="0" rtlCol="0" anchor="ctr"/>
-          <a:lstStyle/>
-          <a:p>
-            <a:pPr indent="0" marL="0">
-              <a:buNone/>
-            </a:pPr>
-            <a:r>
-              <a:rPr lang="en-US" sz="740" b="1" dirty="0">
-                <a:solidFill>
-                  <a:srgbClr val="1F2328"/>
-                </a:solidFill>
-                <a:latin typeface="Arial" pitchFamily="34" charset="0"/>
-                <a:ea typeface="Arial" pitchFamily="34" charset="-122"/>
-                <a:cs typeface="Arial" pitchFamily="34" charset="-120"/>
-              </a:rPr>
-              <a:t>Horizon</a:t>
-            </a:r>
-            <a:pPr indent="0" marL="0">
-              <a:buNone/>
-            </a:pPr>
-            <a:r>
-              <a:rPr lang="en-US" sz="740" dirty="0">
-                <a:solidFill>
-                  <a:srgbClr val="5B6570"/>
-                </a:solidFill>
-                <a:latin typeface="Arial" pitchFamily="34" charset="0"/>
-                <a:ea typeface="Arial" pitchFamily="34" charset="-122"/>
-                <a:cs typeface="Arial" pitchFamily="34" charset="-120"/>
-              </a:rPr>
-              <a:t>  Where the part is heading technically</a:t>
-            </a:r>
-            <a:endParaRPr lang="en-US" sz="740" dirty="0"/>
-          </a:p>
-        </p:txBody>
-      </p:sp>
-      <p:sp>
-        <p:nvSpPr>
-          <p:cNvPr id="32" name="Text 30"/>
-          <p:cNvSpPr txBox="1"/>
-          <p:nvPr/>
-        </p:nvSpPr>
-        <p:spPr>
-          <a:xfrm>
-            <a:off x="3355848" y="6249924"/>
-            <a:ext cx="2761488" cy="164592"/>
-          </a:xfrm>
-          <a:prstGeom prst="rect">
-            <a:avLst/>
-          </a:prstGeom>
-          <a:noFill/>
-          <a:ln/>
-        </p:spPr>
-        <p:txBody>
-          <a:bodyPr wrap="square" lIns="0" tIns="0" rIns="0" bIns="0" rtlCol="0" anchor="ctr"/>
-          <a:lstStyle/>
-          <a:p>
-            <a:pPr indent="0" marL="0">
-              <a:buNone/>
-            </a:pPr>
-            <a:r>
-              <a:rPr lang="en-US" sz="740" b="1" dirty="0">
-                <a:solidFill>
-                  <a:srgbClr val="1F2328"/>
-                </a:solidFill>
-                <a:latin typeface="Arial" pitchFamily="34" charset="0"/>
-                <a:ea typeface="Arial" pitchFamily="34" charset="-122"/>
-                <a:cs typeface="Arial" pitchFamily="34" charset="-120"/>
-              </a:rPr>
-              <a:t>Trends</a:t>
-            </a:r>
-            <a:pPr indent="0" marL="0">
-              <a:buNone/>
-            </a:pPr>
-            <a:r>
-              <a:rPr lang="en-US" sz="740" dirty="0">
-                <a:solidFill>
-                  <a:srgbClr val="5B6570"/>
-                </a:solidFill>
-                <a:latin typeface="Arial" pitchFamily="34" charset="0"/>
-                <a:ea typeface="Arial" pitchFamily="34" charset="-122"/>
-                <a:cs typeface="Arial" pitchFamily="34" charset="-120"/>
-              </a:rPr>
-              <a:t>  Commodity trends and the real levers</a:t>
-            </a:r>
-            <a:endParaRPr lang="en-US" sz="740" dirty="0"/>
-          </a:p>
-        </p:txBody>
-      </p:sp>
-      <p:sp>
-        <p:nvSpPr>
-          <p:cNvPr id="33" name="Shape 31"/>
+          <p:cNvPr id="15" name="Shape 13"/>
           <p:cNvSpPr/>
           <p:nvPr/>
         </p:nvSpPr>
         <p:spPr>
           <a:xfrm>
             <a:off x="6355080" y="859536"/>
-            <a:ext cx="2788920" cy="1152144"/>
+            <a:ext cx="2788920" cy="1508760"/>
           </a:xfrm>
           <a:prstGeom prst="roundRect">
             <a:avLst>
-              <a:gd name="adj" fmla="val 7143"/>
+              <a:gd name="adj" fmla="val 5455"/>
             </a:avLst>
           </a:prstGeom>
           <a:solidFill>
@@ -2538,7 +1766,7 @@
       </p:sp>
       <p:sp>
         <p:nvSpPr>
-          <p:cNvPr id="34" name="Text 32"/>
+          <p:cNvPr id="16" name="Text 14"/>
           <p:cNvSpPr txBox="1"/>
           <p:nvPr/>
         </p:nvSpPr>
@@ -2577,14 +1805,14 @@
       </p:sp>
       <p:sp>
         <p:nvSpPr>
-          <p:cNvPr id="35" name="Text 33"/>
+          <p:cNvPr id="17" name="Text 15"/>
           <p:cNvSpPr txBox="1"/>
           <p:nvPr/>
         </p:nvSpPr>
         <p:spPr>
           <a:xfrm>
             <a:off x="6537960" y="1207008"/>
-            <a:ext cx="2423160" cy="859536"/>
+            <a:ext cx="2423160" cy="1060704"/>
           </a:xfrm>
           <a:prstGeom prst="rect">
             <a:avLst/>
@@ -2598,7 +1826,7 @@
           <a:p>
             <a:pPr indent="0" marL="0">
               <a:lnSpc>
-                <a:spcPct val="92000"/>
+                <a:spcPct val="94000"/>
               </a:lnSpc>
               <a:buNone/>
             </a:pPr>
@@ -2618,7 +1846,7 @@
           <a:p>
             <a:pPr indent="0" marL="0">
               <a:lnSpc>
-                <a:spcPct val="92000"/>
+                <a:spcPct val="94000"/>
               </a:lnSpc>
               <a:buNone/>
             </a:pPr>
@@ -2638,7 +1866,7 @@
           <a:p>
             <a:pPr indent="0" marL="0">
               <a:lnSpc>
-                <a:spcPct val="92000"/>
+                <a:spcPct val="94000"/>
               </a:lnSpc>
               <a:buNone/>
             </a:pPr>
@@ -2658,12 +1886,12 @@
           <a:p>
             <a:pPr indent="0" marL="0">
               <a:lnSpc>
-                <a:spcPct val="92000"/>
-              </a:lnSpc>
-              <a:buNone/>
-            </a:pPr>
-            <a:r>
-              <a:rPr lang="en-US" sz="720" i="1" dirty="0">
+                <a:spcPct val="94000"/>
+              </a:lnSpc>
+              <a:buNone/>
+            </a:pPr>
+            <a:r>
+              <a:rPr lang="en-US" sz="740" i="1" dirty="0">
                 <a:solidFill>
                   <a:srgbClr val="5B6570"/>
                 </a:solidFill>
@@ -2671,7 +1899,7 @@
                 <a:ea typeface="Arial" pitchFamily="34" charset="-122"/>
                 <a:cs typeface="Arial" pitchFamily="34" charset="-120"/>
               </a:rPr>
-              <a:t>Engineering hours released × loaded rate, plus confirmed piece-cost saving × annual volume.</a:t>
+              <a:t>Engineer hours released × loaded rate, plus the savings the engine confirms × annual volume.</a:t>
             </a:r>
             <a:endParaRPr lang="en-US" sz="950" dirty="0"/>
           </a:p>
@@ -2679,13 +1907,13 @@
       </p:sp>
       <p:sp>
         <p:nvSpPr>
-          <p:cNvPr id="36" name="Shape 34"/>
+          <p:cNvPr id="18" name="Shape 16"/>
           <p:cNvSpPr/>
           <p:nvPr/>
         </p:nvSpPr>
         <p:spPr>
           <a:xfrm>
-            <a:off x="6355080" y="2103120"/>
+            <a:off x="6355080" y="2441448"/>
             <a:ext cx="2788920" cy="420624"/>
           </a:xfrm>
           <a:prstGeom prst="roundRect">
@@ -2706,13 +1934,13 @@
       </p:sp>
       <p:sp>
         <p:nvSpPr>
-          <p:cNvPr id="37" name="Text 35"/>
+          <p:cNvPr id="19" name="Text 17"/>
           <p:cNvSpPr txBox="1"/>
           <p:nvPr/>
         </p:nvSpPr>
         <p:spPr>
           <a:xfrm>
-            <a:off x="6537960" y="2203704"/>
+            <a:off x="6537960" y="2542032"/>
             <a:ext cx="2377440" cy="219456"/>
           </a:xfrm>
           <a:prstGeom prst="rect">
@@ -2745,14 +1973,14 @@
       </p:sp>
       <p:sp>
         <p:nvSpPr>
-          <p:cNvPr id="38" name="Shape 36"/>
+          <p:cNvPr id="20" name="Shape 18"/>
           <p:cNvSpPr/>
           <p:nvPr/>
         </p:nvSpPr>
         <p:spPr>
           <a:xfrm>
-            <a:off x="6355080" y="2615184"/>
-            <a:ext cx="2788920" cy="4014216"/>
+            <a:off x="6355080" y="2935224"/>
+            <a:ext cx="2788920" cy="3694176"/>
           </a:xfrm>
           <a:prstGeom prst="roundRect">
             <a:avLst>
@@ -2772,13 +2000,13 @@
       </p:sp>
       <p:sp>
         <p:nvSpPr>
-          <p:cNvPr id="39" name="Text 37"/>
+          <p:cNvPr id="21" name="Text 19"/>
           <p:cNvSpPr txBox="1"/>
           <p:nvPr/>
         </p:nvSpPr>
         <p:spPr>
           <a:xfrm>
-            <a:off x="6537960" y="2706624"/>
+            <a:off x="6537960" y="3026664"/>
             <a:ext cx="2377440" cy="219456"/>
           </a:xfrm>
           <a:prstGeom prst="rect">
@@ -2811,14 +2039,14 @@
       </p:sp>
       <p:sp>
         <p:nvSpPr>
-          <p:cNvPr id="40" name="Text 38"/>
+          <p:cNvPr id="22" name="Text 20"/>
           <p:cNvSpPr txBox="1"/>
           <p:nvPr/>
         </p:nvSpPr>
         <p:spPr>
           <a:xfrm>
-            <a:off x="6537960" y="2980944"/>
-            <a:ext cx="2423160" cy="3529584"/>
+            <a:off x="6537960" y="3300984"/>
+            <a:ext cx="2423160" cy="3255264"/>
           </a:xfrm>
           <a:prstGeom prst="rect">
             <a:avLst/>
@@ -2845,7 +2073,7 @@
                 <a:ea typeface="Arial" pitchFamily="34" charset="-122"/>
                 <a:cs typeface="Arial" pitchFamily="34" charset="-120"/>
               </a:rPr>
-              <a:t>Capacity  </a:t>
+              <a:t>More parts covered.  </a:t>
             </a:r>
             <a:pPr indent="0" marL="0">
               <a:lnSpc>
@@ -2865,7 +2093,7 @@
                 <a:ea typeface="Arial" pitchFamily="34" charset="-122"/>
                 <a:cs typeface="Arial" pitchFamily="34" charset="-120"/>
               </a:rPr>
-              <a:t>Hundreds of parts a programme, not a workshop shortlist.</a:t>
+              <a:t>A programme has thousands of parts. This looks at all of them, not the few a workshop reaches.</a:t>
             </a:r>
             <a:endParaRPr lang="en-US" sz="820" dirty="0"/>
           </a:p>
@@ -2885,7 +2113,7 @@
                 <a:ea typeface="Arial" pitchFamily="34" charset="-122"/>
                 <a:cs typeface="Arial" pitchFamily="34" charset="-120"/>
               </a:rPr>
-              <a:t>Speed  </a:t>
+              <a:t>Much faster.  </a:t>
             </a:r>
             <a:pPr indent="0" marL="0">
               <a:lnSpc>
@@ -2905,7 +2133,7 @@
                 <a:ea typeface="Arial" pitchFamily="34" charset="-122"/>
                 <a:cs typeface="Arial" pitchFamily="34" charset="-120"/>
               </a:rPr>
-              <a:t>Ideas in minutes, already described and costed. No chase cycle.</a:t>
+              <a:t>An idea arrives already written up and already costed, so there is nothing to chase afterwards.</a:t>
             </a:r>
             <a:endParaRPr lang="en-US" sz="820" dirty="0"/>
           </a:p>
@@ -2925,7 +2153,7 @@
                 <a:ea typeface="Arial" pitchFamily="34" charset="-122"/>
                 <a:cs typeface="Arial" pitchFamily="34" charset="-120"/>
               </a:rPr>
-              <a:t>Depth  </a:t>
+              <a:t>Better ideas.  </a:t>
             </a:r>
             <a:pPr indent="0" marL="0">
               <a:lnSpc>
@@ -2945,7 +2173,7 @@
                 <a:ea typeface="Arial" pitchFamily="34" charset="-122"/>
                 <a:cs typeface="Arial" pitchFamily="34" charset="-120"/>
               </a:rPr>
-              <a:t>Process, material, tolerance and a calculated saving on every idea.</a:t>
+              <a:t>Each one names the change, the process, the material and the saving per part.</a:t>
             </a:r>
             <a:endParaRPr lang="en-US" sz="820" dirty="0"/>
           </a:p>
@@ -2965,7 +2193,7 @@
                 <a:ea typeface="Arial" pitchFamily="34" charset="-122"/>
                 <a:cs typeface="Arial" pitchFamily="34" charset="-120"/>
               </a:rPr>
-              <a:t>Consistency  </a:t>
+              <a:t>The same standard every time.  </a:t>
             </a:r>
             <a:pPr indent="0" marL="0">
               <a:lnSpc>
@@ -2985,7 +2213,7 @@
                 <a:ea typeface="Arial" pitchFamily="34" charset="-122"/>
                 <a:cs typeface="Arial" pitchFamily="34" charset="-120"/>
               </a:rPr>
-              <a:t>The same method every time, whoever is available that week.</a:t>
+              <a:t>It does not depend on who was available that week.</a:t>
             </a:r>
             <a:endParaRPr lang="en-US" sz="820" dirty="0"/>
           </a:p>
@@ -3005,7 +2233,7 @@
                 <a:ea typeface="Arial" pitchFamily="34" charset="-122"/>
                 <a:cs typeface="Arial" pitchFamily="34" charset="-120"/>
               </a:rPr>
-              <a:t>Coverage  </a:t>
+              <a:t>Numbers Finance can check.  </a:t>
             </a:r>
             <a:pPr indent="0" marL="0">
               <a:lnSpc>
@@ -3025,7 +2253,7 @@
                 <a:ea typeface="Arial" pitchFamily="34" charset="-122"/>
                 <a:cs typeface="Arial" pitchFamily="34" charset="-120"/>
               </a:rPr>
-              <a:t>Every commodity, including the ones a workshop never reaches.</a:t>
+              <a:t>Every saving is calculated and the working is shown, so less of it gets discounted.</a:t>
             </a:r>
             <a:endParaRPr lang="en-US" sz="820" dirty="0"/>
           </a:p>
@@ -3045,7 +2273,7 @@
                 <a:ea typeface="Arial" pitchFamily="34" charset="-122"/>
                 <a:cs typeface="Arial" pitchFamily="34" charset="-120"/>
               </a:rPr>
-              <a:t>Evidence  </a:t>
+              <a:t>Nothing is lost.  </a:t>
             </a:r>
             <a:pPr indent="0" marL="0">
               <a:lnSpc>
@@ -3065,7 +2293,7 @@
                 <a:ea typeface="Arial" pitchFamily="34" charset="-122"/>
                 <a:cs typeface="Arial" pitchFamily="34" charset="-120"/>
               </a:rPr>
-              <a:t>Savings come from a cost engine Finance can check, not an opinion.</a:t>
+              <a:t>Ideas, decisions and confirmed savings are kept and reused on the next programme.</a:t>
             </a:r>
             <a:endParaRPr lang="en-US" sz="820" dirty="0"/>
           </a:p>
@@ -3085,15 +2313,12 @@
                 <a:ea typeface="Arial" pitchFamily="34" charset="-122"/>
                 <a:cs typeface="Arial" pitchFamily="34" charset="-120"/>
               </a:rPr>
-              <a:t>Retention  </a:t>
+              <a:t>Better use of engineers.  </a:t>
             </a:r>
             <a:pPr indent="0" marL="0">
               <a:lnSpc>
                 <a:spcPct val="94000"/>
               </a:lnSpc>
-              <a:spcAft>
-                <a:spcPts val="600"/>
-              </a:spcAft>
               <a:buNone/>
             </a:pPr>
             <a:r>
@@ -3105,63 +2330,26 @@
                 <a:ea typeface="Arial" pitchFamily="34" charset="-122"/>
                 <a:cs typeface="Arial" pitchFamily="34" charset="-120"/>
               </a:rPr>
-              <a:t>Ideas, decisions and confirmed savings are kept and reused.</a:t>
+              <a:t>Their time goes on judging and implementing ideas rather than collecting data.</a:t>
             </a:r>
             <a:endParaRPr lang="en-US" sz="820" dirty="0"/>
           </a:p>
-          <a:p>
-            <a:pPr indent="0" marL="0">
-              <a:lnSpc>
-                <a:spcPct val="94000"/>
-              </a:lnSpc>
-              <a:buNone/>
-            </a:pPr>
-            <a:r>
-              <a:rPr lang="en-US" sz="820" b="1" dirty="0">
-                <a:solidFill>
-                  <a:srgbClr val="1F2328"/>
-                </a:solidFill>
-                <a:latin typeface="Arial" pitchFamily="34" charset="0"/>
-                <a:ea typeface="Arial" pitchFamily="34" charset="-122"/>
-                <a:cs typeface="Arial" pitchFamily="34" charset="-120"/>
-              </a:rPr>
-              <a:t>Engineers  </a:t>
-            </a:r>
-            <a:pPr indent="0" marL="0">
-              <a:lnSpc>
-                <a:spcPct val="94000"/>
-              </a:lnSpc>
-              <a:buNone/>
-            </a:pPr>
-            <a:r>
-              <a:rPr lang="en-US" sz="820" dirty="0">
-                <a:solidFill>
-                  <a:srgbClr val="1F2328"/>
-                </a:solidFill>
-                <a:latin typeface="Arial" pitchFamily="34" charset="0"/>
-                <a:ea typeface="Arial" pitchFamily="34" charset="-122"/>
-                <a:cs typeface="Arial" pitchFamily="34" charset="-120"/>
-              </a:rPr>
-              <a:t>Freed from data entry to judge and implement the ideas.</a:t>
-            </a:r>
-            <a:endParaRPr lang="en-US" sz="820" dirty="0"/>
-          </a:p>
         </p:txBody>
       </p:sp>
       <p:sp>
         <p:nvSpPr>
-          <p:cNvPr id="41" name="Shape 39"/>
+          <p:cNvPr id="23" name="Shape 21"/>
           <p:cNvSpPr/>
           <p:nvPr/>
         </p:nvSpPr>
         <p:spPr>
           <a:xfrm>
             <a:off x="9281160" y="859536"/>
-            <a:ext cx="2679192" cy="1152144"/>
+            <a:ext cx="2679192" cy="1508760"/>
           </a:xfrm>
           <a:prstGeom prst="roundRect">
             <a:avLst>
-              <a:gd name="adj" fmla="val 7143"/>
+              <a:gd name="adj" fmla="val 5455"/>
             </a:avLst>
           </a:prstGeom>
           <a:solidFill>
@@ -3177,7 +2365,7 @@
       </p:sp>
       <p:sp>
         <p:nvSpPr>
-          <p:cNvPr id="42" name="Text 40"/>
+          <p:cNvPr id="24" name="Text 22"/>
           <p:cNvSpPr txBox="1"/>
           <p:nvPr/>
         </p:nvSpPr>
@@ -3216,7 +2404,7 @@
       </p:sp>
       <p:sp>
         <p:nvSpPr>
-          <p:cNvPr id="43" name="Text 41"/>
+          <p:cNvPr id="25" name="Text 23"/>
           <p:cNvSpPr txBox="1"/>
           <p:nvPr/>
         </p:nvSpPr>
@@ -3272,13 +2460,13 @@
       </p:sp>
       <p:sp>
         <p:nvSpPr>
-          <p:cNvPr id="44" name="Text 42"/>
+          <p:cNvPr id="26" name="Text 24"/>
           <p:cNvSpPr txBox="1"/>
           <p:nvPr/>
         </p:nvSpPr>
         <p:spPr>
           <a:xfrm>
-            <a:off x="9464040" y="1609344"/>
+            <a:off x="9464040" y="1783080"/>
             <a:ext cx="1691640" cy="402336"/>
           </a:xfrm>
           <a:prstGeom prst="rect">
@@ -3328,13 +2516,13 @@
       </p:sp>
       <p:sp>
         <p:nvSpPr>
-          <p:cNvPr id="45" name="Shape 43"/>
+          <p:cNvPr id="27" name="Shape 25"/>
           <p:cNvSpPr/>
           <p:nvPr/>
         </p:nvSpPr>
         <p:spPr>
           <a:xfrm>
-            <a:off x="11430000" y="1664208"/>
+            <a:off x="11430000" y="1837944"/>
             <a:ext cx="219456" cy="219456"/>
           </a:xfrm>
           <a:prstGeom prst="rect">
@@ -3353,14 +2541,14 @@
       </p:sp>
       <p:sp>
         <p:nvSpPr>
-          <p:cNvPr id="46" name="Shape 44"/>
+          <p:cNvPr id="28" name="Shape 26"/>
           <p:cNvSpPr/>
           <p:nvPr/>
         </p:nvSpPr>
         <p:spPr>
           <a:xfrm>
-            <a:off x="9281160" y="2103120"/>
-            <a:ext cx="2679192" cy="4526280"/>
+            <a:off x="9281160" y="2441448"/>
+            <a:ext cx="2679192" cy="4187952"/>
           </a:xfrm>
           <a:prstGeom prst="roundRect">
             <a:avLst>
@@ -3380,13 +2568,13 @@
       </p:sp>
       <p:sp>
         <p:nvSpPr>
-          <p:cNvPr id="47" name="Text 45"/>
+          <p:cNvPr id="29" name="Text 27"/>
           <p:cNvSpPr txBox="1"/>
           <p:nvPr/>
         </p:nvSpPr>
         <p:spPr>
           <a:xfrm>
-            <a:off x="9464040" y="2194560"/>
+            <a:off x="9464040" y="2532888"/>
             <a:ext cx="2286000" cy="219456"/>
           </a:xfrm>
           <a:prstGeom prst="rect">
@@ -3419,14 +2607,14 @@
       </p:sp>
       <p:sp>
         <p:nvSpPr>
-          <p:cNvPr id="48" name="Text 46"/>
+          <p:cNvPr id="30" name="Text 28"/>
           <p:cNvSpPr txBox="1"/>
           <p:nvPr/>
         </p:nvSpPr>
         <p:spPr>
           <a:xfrm>
-            <a:off x="9464040" y="2468880"/>
-            <a:ext cx="2313432" cy="4059936"/>
+            <a:off x="9464040" y="2788920"/>
+            <a:ext cx="2313432" cy="3785616"/>
           </a:xfrm>
           <a:prstGeom prst="rect">
             <a:avLst/>
@@ -3476,7 +2664,7 @@
                 <a:ea typeface="Arial" pitchFamily="34" charset="-122"/>
                 <a:cs typeface="Arial" pitchFamily="34" charset="-120"/>
               </a:rPr>
-              <a:t>NO — standalone application, already built. Feeds existing costing systems by export.</a:t>
+              <a:t>NO — it is a separate application and it is already built and running. It feeds the existing costing systems by export.</a:t>
             </a:r>
             <a:endParaRPr lang="en-US" sz="880" dirty="0"/>
           </a:p>
@@ -3542,7 +2730,7 @@
                 <a:ea typeface="Arial" pitchFamily="34" charset="-122"/>
                 <a:cs typeface="Arial" pitchFamily="34" charset="-120"/>
               </a:rPr>
-              <a:t>YES — hosting, a persistent volume and an API key. No new hardware.</a:t>
+              <a:t>YES — somewhere to host it, a disk that persists, and an API key. No new hardware.</a:t>
             </a:r>
             <a:endParaRPr lang="en-US" sz="880" dirty="0"/>
           </a:p>
@@ -3585,7 +2773,7 @@
                 <a:ea typeface="Arial" pitchFamily="34" charset="-122"/>
                 <a:cs typeface="Arial" pitchFamily="34" charset="-120"/>
               </a:rPr>
-              <a:t>CAD, drawings and cost data stay inside the deployment. Accounts hold a work email only.</a:t>
+              <a:t>CAD, drawings and cost data stay inside the deployment. Accounts hold a work email address and nothing else.</a:t>
             </a:r>
             <a:endParaRPr lang="en-US" sz="880" dirty="0"/>
           </a:p>
@@ -3605,7 +2793,7 @@
                 <a:ea typeface="Arial" pitchFamily="34" charset="-122"/>
                 <a:cs typeface="Arial" pitchFamily="34" charset="-120"/>
               </a:rPr>
-              <a:t>To start a run:</a:t>
+              <a:t>What a run needs:</a:t>
             </a:r>
             <a:endParaRPr lang="en-US" sz="880" dirty="0"/>
           </a:p>
@@ -3628,7 +2816,7 @@
                 <a:ea typeface="Arial" pitchFamily="34" charset="-122"/>
                 <a:cs typeface="Arial" pitchFamily="34" charset="-120"/>
               </a:rPr>
-              <a:t>3D CAD (STEP or native), 2D drawings, annual volume, and the current price or quote where there is one.</a:t>
+              <a:t>3D CAD (STEP or native), 2D drawings, annual volume, and the current price or supplier quote where there is one.</a:t>
             </a:r>
             <a:endParaRPr lang="en-US" sz="880" dirty="0"/>
           </a:p>
@@ -3648,7 +2836,7 @@
                 <a:ea typeface="Arial" pitchFamily="34" charset="-122"/>
                 <a:cs typeface="Arial" pitchFamily="34" charset="-120"/>
               </a:rPr>
-              <a:t>Output:</a:t>
+              <a:t>What comes out:</a:t>
             </a:r>
             <a:endParaRPr lang="en-US" sz="880" dirty="0"/>
           </a:p>
@@ -3671,7 +2859,7 @@
                 <a:ea typeface="Arial" pitchFamily="34" charset="-122"/>
                 <a:cs typeface="Arial" pitchFamily="34" charset="-120"/>
               </a:rPr>
-              <a:t>Excel, PowerPoint and PDF, straight into the programme review.</a:t>
+              <a:t>Excel, PowerPoint and PDF, ready for the programme review.</a:t>
             </a:r>
             <a:endParaRPr lang="en-US" sz="880" dirty="0"/>
           </a:p>
@@ -3691,7 +2879,7 @@
                 <a:ea typeface="Arial" pitchFamily="34" charset="-122"/>
                 <a:cs typeface="Arial" pitchFamily="34" charset="-120"/>
               </a:rPr>
-              <a:t>Proving it:</a:t>
+              <a:t>How to prove it:</a:t>
             </a:r>
             <a:endParaRPr lang="en-US" sz="880" dirty="0"/>
           </a:p>
@@ -3711,7 +2899,7 @@
                 <a:ea typeface="Arial" pitchFamily="34" charset="-122"/>
                 <a:cs typeface="Arial" pitchFamily="34" charset="-120"/>
               </a:rPr>
-              <a:t>Run parts already costed by hand and compare, before anything is relied on.</a:t>
+              <a:t>Run a set of parts that have already been costed by hand and compare the two, before anything is relied on.</a:t>
             </a:r>
             <a:endParaRPr lang="en-US" sz="880" dirty="0"/>
           </a:p>

--- a/BrainSpark_Business_Case.pptx
+++ b/BrainSpark_Business_Case.pptx
@@ -2664,7 +2664,7 @@
                 <a:ea typeface="Arial" pitchFamily="34" charset="-122"/>
                 <a:cs typeface="Arial" pitchFamily="34" charset="-120"/>
               </a:rPr>
-              <a:t>NO — it is a separate application and it is already built and running. It feeds the existing costing systems by export.</a:t>
+              <a:t>NO — a separate application, already built and running. It feeds the existing costing system by export and does not replace the costing method.</a:t>
             </a:r>
             <a:endParaRPr lang="en-US" sz="880" dirty="0"/>
           </a:p>
@@ -2773,7 +2773,7 @@
                 <a:ea typeface="Arial" pitchFamily="34" charset="-122"/>
                 <a:cs typeface="Arial" pitchFamily="34" charset="-120"/>
               </a:rPr>
-              <a:t>CAD, drawings and cost data stay inside the deployment. Accounts hold a work email address and nothing else.</a:t>
+              <a:t>CAD and drawing files are processed on the server and are never sent out. Text taken from them — part name, dimensions, material, cost figures — goes to the Anthropic API so the ideas can be written, and so does a supplier quote if you upload one to be read. Accounts hold a work email and nothing else.</a:t>
             </a:r>
             <a:endParaRPr lang="en-US" sz="880" dirty="0"/>
           </a:p>
@@ -2859,7 +2859,7 @@
                 <a:ea typeface="Arial" pitchFamily="34" charset="-122"/>
                 <a:cs typeface="Arial" pitchFamily="34" charset="-120"/>
               </a:rPr>
-              <a:t>Excel, PowerPoint and PDF, ready for the programme review.</a:t>
+              <a:t>Excel, PowerPoint and PDF for the programme review.</a:t>
             </a:r>
             <a:endParaRPr lang="en-US" sz="880" dirty="0"/>
           </a:p>
@@ -2899,7 +2899,7 @@
                 <a:ea typeface="Arial" pitchFamily="34" charset="-122"/>
                 <a:cs typeface="Arial" pitchFamily="34" charset="-120"/>
               </a:rPr>
-              <a:t>Run a set of parts that have already been costed by hand and compare the two, before anything is relied on.</a:t>
+              <a:t>Run parts already costed by hand and compare, before anything is relied on.</a:t>
             </a:r>
             <a:endParaRPr lang="en-US" sz="880" dirty="0"/>
           </a:p>

--- a/BrainSpark_Business_Case.pptx
+++ b/BrainSpark_Business_Case.pptx
@@ -962,11 +962,11 @@
         <p:spPr>
           <a:xfrm>
             <a:off x="228600" y="859536"/>
-            <a:ext cx="5989320" cy="1508760"/>
+            <a:ext cx="5989320" cy="1746504"/>
           </a:xfrm>
           <a:prstGeom prst="roundRect">
             <a:avLst>
-              <a:gd name="adj" fmla="val 5455"/>
+              <a:gd name="adj" fmla="val 4712"/>
             </a:avLst>
           </a:prstGeom>
           <a:solidFill>
@@ -1092,7 +1092,7 @@
         <p:spPr>
           <a:xfrm>
             <a:off x="438912" y="1207008"/>
-            <a:ext cx="5568696" cy="1143000"/>
+            <a:ext cx="5568696" cy="1325880"/>
           </a:xfrm>
           <a:prstGeom prst="rect">
             <a:avLst/>
@@ -1106,122 +1106,248 @@
           <a:p>
             <a:pPr marL="342900" indent="-342900">
               <a:lnSpc>
-                <a:spcPct val="95000"/>
-              </a:lnSpc>
-              <a:spcAft>
-                <a:spcPts val="100"/>
-              </a:spcAft>
+                <a:spcPct val="93000"/>
+              </a:lnSpc>
               <a:buSzPct val="100000"/>
               <a:buChar char="•"/>
             </a:pPr>
             <a:r>
-              <a:rPr lang="en-US" sz="820" dirty="0">
-                <a:solidFill>
-                  <a:srgbClr val="1F2328"/>
-                </a:solidFill>
-                <a:latin typeface="Arial" pitchFamily="34" charset="0"/>
-                <a:ea typeface="Arial" pitchFamily="34" charset="-122"/>
-                <a:cs typeface="Arial" pitchFamily="34" charset="-120"/>
-              </a:rPr>
-              <a:t>Cost reduction ideas come out of workshops. Setting one up takes weeks, and what comes out of it depends on who happened to be free that week.</a:t>
-            </a:r>
-            <a:endParaRPr lang="en-US" sz="820" dirty="0"/>
+              <a:rPr lang="en-US" sz="780" b="1" dirty="0">
+                <a:solidFill>
+                  <a:srgbClr val="1F2328"/>
+                </a:solidFill>
+                <a:latin typeface="Arial" pitchFamily="34" charset="0"/>
+                <a:ea typeface="Arial" pitchFamily="34" charset="-122"/>
+                <a:cs typeface="Arial" pitchFamily="34" charset="-120"/>
+              </a:rPr>
+              <a:t>Most of the cost is never challenged. </a:t>
+            </a:r>
+            <a:pPr indent="0" marL="0">
+              <a:lnSpc>
+                <a:spcPct val="93000"/>
+              </a:lnSpc>
+              <a:spcAft>
+                <a:spcPts val="50"/>
+              </a:spcAft>
+              <a:buNone/>
+            </a:pPr>
+            <a:r>
+              <a:rPr lang="en-US" sz="780" dirty="0">
+                <a:solidFill>
+                  <a:srgbClr val="1F2328"/>
+                </a:solidFill>
+                <a:latin typeface="Arial" pitchFamily="34" charset="0"/>
+                <a:ea typeface="Arial" pitchFamily="34" charset="-122"/>
+                <a:cs typeface="Arial" pitchFamily="34" charset="-120"/>
+              </a:rPr>
+              <a:t>A programme carries thousands of parts; a workshop reaches a few dozen, so most of the spend is never looked at.</a:t>
+            </a:r>
+            <a:endParaRPr lang="en-US" sz="780" dirty="0"/>
           </a:p>
           <a:p>
             <a:pPr marL="342900" indent="-342900">
               <a:lnSpc>
-                <a:spcPct val="95000"/>
-              </a:lnSpc>
-              <a:spcAft>
-                <a:spcPts val="100"/>
-              </a:spcAft>
+                <a:spcPct val="93000"/>
+              </a:lnSpc>
               <a:buSzPct val="100000"/>
               <a:buChar char="•"/>
             </a:pPr>
             <a:r>
-              <a:rPr lang="en-US" sz="820" dirty="0">
-                <a:solidFill>
-                  <a:srgbClr val="1F2328"/>
-                </a:solidFill>
-                <a:latin typeface="Arial" pitchFamily="34" charset="0"/>
-                <a:ea typeface="Arial" pitchFamily="34" charset="-122"/>
-                <a:cs typeface="Arial" pitchFamily="34" charset="-120"/>
-              </a:rPr>
-              <a:t>Most ideas arrive as a single line — "change the material", "delete the bracket". No process named, no grade, no tolerance and no number.</a:t>
-            </a:r>
-            <a:endParaRPr lang="en-US" sz="820" dirty="0"/>
+              <a:rPr lang="en-US" sz="780" b="1" dirty="0">
+                <a:solidFill>
+                  <a:srgbClr val="1F2328"/>
+                </a:solidFill>
+                <a:latin typeface="Arial" pitchFamily="34" charset="0"/>
+                <a:ea typeface="Arial" pitchFamily="34" charset="-122"/>
+                <a:cs typeface="Arial" pitchFamily="34" charset="-120"/>
+              </a:rPr>
+              <a:t>Ideas cannot be used as written. </a:t>
+            </a:r>
+            <a:pPr indent="0" marL="0">
+              <a:lnSpc>
+                <a:spcPct val="93000"/>
+              </a:lnSpc>
+              <a:spcAft>
+                <a:spcPts val="50"/>
+              </a:spcAft>
+              <a:buNone/>
+            </a:pPr>
+            <a:r>
+              <a:rPr lang="en-US" sz="780" dirty="0">
+                <a:solidFill>
+                  <a:srgbClr val="1F2328"/>
+                </a:solidFill>
+                <a:latin typeface="Arial" pitchFamily="34" charset="0"/>
+                <a:ea typeface="Arial" pitchFamily="34" charset="-122"/>
+                <a:cs typeface="Arial" pitchFamily="34" charset="-120"/>
+              </a:rPr>
+              <a:t>They come as single lines — "change the material", "delete the bracket" — with no process, grade, tolerance or number, so nobody can act on one without going back to whoever wrote it.</a:t>
+            </a:r>
+            <a:endParaRPr lang="en-US" sz="780" dirty="0"/>
           </a:p>
           <a:p>
             <a:pPr marL="342900" indent="-342900">
               <a:lnSpc>
-                <a:spcPct val="95000"/>
-              </a:lnSpc>
-              <a:spcAft>
-                <a:spcPts val="100"/>
-              </a:spcAft>
+                <a:spcPct val="93000"/>
+              </a:lnSpc>
               <a:buSzPct val="100000"/>
               <a:buChar char="•"/>
             </a:pPr>
             <a:r>
-              <a:rPr lang="en-US" sz="820" dirty="0">
-                <a:solidFill>
-                  <a:srgbClr val="1F2328"/>
-                </a:solidFill>
-                <a:latin typeface="Arial" pitchFamily="34" charset="0"/>
-                <a:ea typeface="Arial" pitchFamily="34" charset="-122"/>
-                <a:cs typeface="Arial" pitchFamily="34" charset="-120"/>
-              </a:rPr>
-              <a:t>Nobody knows whether an idea is worth 20p or £2 until someone costs it by hand.</a:t>
-            </a:r>
-            <a:endParaRPr lang="en-US" sz="820" dirty="0"/>
+              <a:rPr lang="en-US" sz="780" b="1" dirty="0">
+                <a:solidFill>
+                  <a:srgbClr val="1F2328"/>
+                </a:solidFill>
+                <a:latin typeface="Arial" pitchFamily="34" charset="0"/>
+                <a:ea typeface="Arial" pitchFamily="34" charset="-122"/>
+                <a:cs typeface="Arial" pitchFamily="34" charset="-120"/>
+              </a:rPr>
+              <a:t>Nothing can be ranked. </a:t>
+            </a:r>
+            <a:pPr indent="0" marL="0">
+              <a:lnSpc>
+                <a:spcPct val="93000"/>
+              </a:lnSpc>
+              <a:spcAft>
+                <a:spcPts val="50"/>
+              </a:spcAft>
+              <a:buNone/>
+            </a:pPr>
+            <a:r>
+              <a:rPr lang="en-US" sz="780" dirty="0">
+                <a:solidFill>
+                  <a:srgbClr val="1F2328"/>
+                </a:solidFill>
+                <a:latin typeface="Arial" pitchFamily="34" charset="0"/>
+                <a:ea typeface="Arial" pitchFamily="34" charset="-122"/>
+                <a:cs typeface="Arial" pitchFamily="34" charset="-120"/>
+              </a:rPr>
+              <a:t>Nobody knows whether an idea is worth 20p or £2 until an engineer costs it by hand, which can take a day for a single idea.</a:t>
+            </a:r>
+            <a:endParaRPr lang="en-US" sz="780" dirty="0"/>
           </a:p>
           <a:p>
             <a:pPr marL="342900" indent="-342900">
               <a:lnSpc>
-                <a:spcPct val="95000"/>
-              </a:lnSpc>
-              <a:spcAft>
-                <a:spcPts val="100"/>
-              </a:spcAft>
+                <a:spcPct val="93000"/>
+              </a:lnSpc>
               <a:buSzPct val="100000"/>
               <a:buChar char="•"/>
             </a:pPr>
             <a:r>
-              <a:rPr lang="en-US" sz="820" dirty="0">
-                <a:solidFill>
-                  <a:srgbClr val="1F2328"/>
-                </a:solidFill>
-                <a:latin typeface="Arial" pitchFamily="34" charset="0"/>
-                <a:ea typeface="Arial" pitchFamily="34" charset="-122"/>
-                <a:cs typeface="Arial" pitchFamily="34" charset="-120"/>
-              </a:rPr>
-              <a:t>A programme has thousands of parts. A workshop gets through a few dozen, and whole commodities are skipped because nobody in the room knew them.</a:t>
-            </a:r>
-            <a:endParaRPr lang="en-US" sz="820" dirty="0"/>
+              <a:rPr lang="en-US" sz="780" b="1" dirty="0">
+                <a:solidFill>
+                  <a:srgbClr val="1F2328"/>
+                </a:solidFill>
+                <a:latin typeface="Arial" pitchFamily="34" charset="0"/>
+                <a:ea typeface="Arial" pitchFamily="34" charset="-122"/>
+                <a:cs typeface="Arial" pitchFamily="34" charset="-120"/>
+              </a:rPr>
+              <a:t>Finance discounts what we submit, </a:t>
+            </a:r>
+            <a:pPr indent="0" marL="0">
+              <a:lnSpc>
+                <a:spcPct val="93000"/>
+              </a:lnSpc>
+              <a:spcAft>
+                <a:spcPts val="50"/>
+              </a:spcAft>
+              <a:buNone/>
+            </a:pPr>
+            <a:r>
+              <a:rPr lang="en-US" sz="780" dirty="0">
+                <a:solidFill>
+                  <a:srgbClr val="1F2328"/>
+                </a:solidFill>
+                <a:latin typeface="Arial" pitchFamily="34" charset="0"/>
+                <a:ea typeface="Arial" pitchFamily="34" charset="-122"/>
+                <a:cs typeface="Arial" pitchFamily="34" charset="-120"/>
+              </a:rPr>
+              <a:t>because the savings are a judgement rather than a calculation. The number that reaches the plan is never the number on the sheet.</a:t>
+            </a:r>
+            <a:endParaRPr lang="en-US" sz="780" dirty="0"/>
           </a:p>
           <a:p>
             <a:pPr marL="342900" indent="-342900">
               <a:lnSpc>
-                <a:spcPct val="95000"/>
-              </a:lnSpc>
-              <a:spcAft>
-                <a:spcPts val="100"/>
-              </a:spcAft>
+                <a:spcPct val="93000"/>
+              </a:lnSpc>
               <a:buSzPct val="100000"/>
               <a:buChar char="•"/>
             </a:pPr>
             <a:r>
-              <a:rPr lang="en-US" sz="820" dirty="0">
-                <a:solidFill>
-                  <a:srgbClr val="1F2328"/>
-                </a:solidFill>
-                <a:latin typeface="Arial" pitchFamily="34" charset="0"/>
-                <a:ea typeface="Arial" pitchFamily="34" charset="-122"/>
-                <a:cs typeface="Arial" pitchFamily="34" charset="-120"/>
-              </a:rPr>
-              <a:t>The same ideas come round again on the next programme, because there is no record of what was already tried and what it turned out to be worth.</a:t>
-            </a:r>
-            <a:endParaRPr lang="en-US" sz="820" dirty="0"/>
+              <a:rPr lang="en-US" sz="780" b="1" dirty="0">
+                <a:solidFill>
+                  <a:srgbClr val="1F2328"/>
+                </a:solidFill>
+                <a:latin typeface="Arial" pitchFamily="34" charset="0"/>
+                <a:ea typeface="Arial" pitchFamily="34" charset="-122"/>
+                <a:cs typeface="Arial" pitchFamily="34" charset="-120"/>
+              </a:rPr>
+              <a:t>The same work is done twice. </a:t>
+            </a:r>
+            <a:pPr indent="0" marL="0">
+              <a:lnSpc>
+                <a:spcPct val="93000"/>
+              </a:lnSpc>
+              <a:spcAft>
+                <a:spcPts val="50"/>
+              </a:spcAft>
+              <a:buNone/>
+            </a:pPr>
+            <a:r>
+              <a:rPr lang="en-US" sz="780" dirty="0">
+                <a:solidFill>
+                  <a:srgbClr val="1F2328"/>
+                </a:solidFill>
+                <a:latin typeface="Arial" pitchFamily="34" charset="0"/>
+                <a:ea typeface="Arial" pitchFamily="34" charset="-122"/>
+                <a:cs typeface="Arial" pitchFamily="34" charset="-120"/>
+              </a:rPr>
+              <a:t>Nothing is kept, so ideas already tried — and ideas already rejected — come round again on the next programme.</a:t>
+            </a:r>
+            <a:endParaRPr lang="en-US" sz="780" dirty="0"/>
+          </a:p>
+          <a:p>
+            <a:pPr marL="342900" indent="-342900">
+              <a:lnSpc>
+                <a:spcPct val="93000"/>
+              </a:lnSpc>
+              <a:buSzPct val="100000"/>
+              <a:buChar char="•"/>
+            </a:pPr>
+            <a:r>
+              <a:rPr lang="en-US" sz="780" b="1" dirty="0">
+                <a:solidFill>
+                  <a:srgbClr val="1F2328"/>
+                </a:solidFill>
+                <a:latin typeface="Arial" pitchFamily="34" charset="0"/>
+                <a:ea typeface="Arial" pitchFamily="34" charset="-122"/>
+                <a:cs typeface="Arial" pitchFamily="34" charset="-120"/>
+              </a:rPr>
+              <a:t>It does not scale. </a:t>
+            </a:r>
+            <a:pPr indent="0" marL="0">
+              <a:lnSpc>
+                <a:spcPct val="93000"/>
+              </a:lnSpc>
+              <a:spcAft>
+                <a:spcPts val="50"/>
+              </a:spcAft>
+              <a:buNone/>
+            </a:pPr>
+            <a:r>
+              <a:rPr lang="en-US" sz="780" dirty="0">
+                <a:solidFill>
+                  <a:srgbClr val="1F2328"/>
+                </a:solidFill>
+                <a:latin typeface="Arial" pitchFamily="34" charset="0"/>
+                <a:ea typeface="Arial" pitchFamily="34" charset="-122"/>
+                <a:cs typeface="Arial" pitchFamily="34" charset="-120"/>
+              </a:rPr>
+              <a:t>More programmes and more variants mean more workshops, and there are only so many people who can run them.</a:t>
+            </a:r>
+            <a:endParaRPr lang="en-US" sz="780" dirty="0"/>
           </a:p>
         </p:txBody>
       </p:sp>
@@ -1233,12 +1359,12 @@
         </p:nvSpPr>
         <p:spPr>
           <a:xfrm>
-            <a:off x="228600" y="2441448"/>
-            <a:ext cx="5989320" cy="1627632"/>
+            <a:off x="228600" y="2642616"/>
+            <a:ext cx="5989320" cy="1444752"/>
           </a:xfrm>
           <a:prstGeom prst="roundRect">
             <a:avLst>
-              <a:gd name="adj" fmla="val 5056"/>
+              <a:gd name="adj" fmla="val 5696"/>
             </a:avLst>
           </a:prstGeom>
           <a:solidFill>
@@ -1260,7 +1386,7 @@
         </p:nvSpPr>
         <p:spPr>
           <a:xfrm>
-            <a:off x="438912" y="2532888"/>
+            <a:off x="438912" y="2734056"/>
             <a:ext cx="2377440" cy="219456"/>
           </a:xfrm>
           <a:prstGeom prst="rect">
@@ -1299,8 +1425,8 @@
         </p:nvSpPr>
         <p:spPr>
           <a:xfrm>
-            <a:off x="438912" y="2788920"/>
-            <a:ext cx="5568696" cy="1261872"/>
+            <a:off x="438912" y="2990088"/>
+            <a:ext cx="5568696" cy="1060704"/>
           </a:xfrm>
           <a:prstGeom prst="rect">
             <a:avLst/>
@@ -1314,146 +1440,207 @@
           <a:p>
             <a:pPr marL="342900" indent="-342900">
               <a:lnSpc>
-                <a:spcPct val="95000"/>
-              </a:lnSpc>
-              <a:spcAft>
-                <a:spcPts val="100"/>
-              </a:spcAft>
+                <a:spcPct val="93000"/>
+              </a:lnSpc>
               <a:buSzPct val="100000"/>
               <a:buChar char="•"/>
             </a:pPr>
             <a:r>
-              <a:rPr lang="en-US" sz="820" dirty="0">
-                <a:solidFill>
-                  <a:srgbClr val="1F2328"/>
-                </a:solidFill>
-                <a:latin typeface="Arial" pitchFamily="34" charset="0"/>
-                <a:ea typeface="Arial" pitchFamily="34" charset="-122"/>
-                <a:cs typeface="Arial" pitchFamily="34" charset="-120"/>
-              </a:rPr>
-              <a:t>One or two experienced engineers carry most of the idea generation. When they are on other work, or they leave, it stops.</a:t>
-            </a:r>
-            <a:endParaRPr lang="en-US" sz="820" dirty="0"/>
+              <a:rPr lang="en-US" sz="780" b="1" dirty="0">
+                <a:solidFill>
+                  <a:srgbClr val="1F2328"/>
+                </a:solidFill>
+                <a:latin typeface="Arial" pitchFamily="34" charset="0"/>
+                <a:ea typeface="Arial" pitchFamily="34" charset="-122"/>
+                <a:cs typeface="Arial" pitchFamily="34" charset="-120"/>
+              </a:rPr>
+              <a:t>One or two people carry it. </a:t>
+            </a:r>
+            <a:pPr indent="0" marL="0">
+              <a:lnSpc>
+                <a:spcPct val="93000"/>
+              </a:lnSpc>
+              <a:spcAft>
+                <a:spcPts val="50"/>
+              </a:spcAft>
+              <a:buNone/>
+            </a:pPr>
+            <a:r>
+              <a:rPr lang="en-US" sz="780" dirty="0">
+                <a:solidFill>
+                  <a:srgbClr val="1F2328"/>
+                </a:solidFill>
+                <a:latin typeface="Arial" pitchFamily="34" charset="0"/>
+                <a:ea typeface="Arial" pitchFamily="34" charset="-122"/>
+                <a:cs typeface="Arial" pitchFamily="34" charset="-120"/>
+              </a:rPr>
+              <a:t>A small number of experienced engineers generate most of the ideas. When they are on other work, or they leave, it stops.</a:t>
+            </a:r>
+            <a:endParaRPr lang="en-US" sz="780" dirty="0"/>
           </a:p>
           <a:p>
             <a:pPr marL="342900" indent="-342900">
               <a:lnSpc>
-                <a:spcPct val="95000"/>
-              </a:lnSpc>
-              <a:spcAft>
-                <a:spcPts val="100"/>
-              </a:spcAft>
+                <a:spcPct val="93000"/>
+              </a:lnSpc>
               <a:buSzPct val="100000"/>
               <a:buChar char="•"/>
             </a:pPr>
             <a:r>
-              <a:rPr lang="en-US" sz="820" dirty="0">
-                <a:solidFill>
-                  <a:srgbClr val="1F2328"/>
-                </a:solidFill>
-                <a:latin typeface="Arial" pitchFamily="34" charset="0"/>
-                <a:ea typeface="Arial" pitchFamily="34" charset="-122"/>
-                <a:cs typeface="Arial" pitchFamily="34" charset="-120"/>
-              </a:rPr>
-              <a:t>Before a workshop can run, someone spends days pulling together drawings, BOMs, current piece costs and benchmark data by hand.</a:t>
-            </a:r>
-            <a:endParaRPr lang="en-US" sz="820" dirty="0"/>
+              <a:rPr lang="en-US" sz="780" b="1" dirty="0">
+                <a:solidFill>
+                  <a:srgbClr val="1F2328"/>
+                </a:solidFill>
+                <a:latin typeface="Arial" pitchFamily="34" charset="0"/>
+                <a:ea typeface="Arial" pitchFamily="34" charset="-122"/>
+                <a:cs typeface="Arial" pitchFamily="34" charset="-120"/>
+              </a:rPr>
+              <a:t>Days of preparation first. </a:t>
+            </a:r>
+            <a:pPr indent="0" marL="0">
+              <a:lnSpc>
+                <a:spcPct val="93000"/>
+              </a:lnSpc>
+              <a:spcAft>
+                <a:spcPts val="50"/>
+              </a:spcAft>
+              <a:buNone/>
+            </a:pPr>
+            <a:r>
+              <a:rPr lang="en-US" sz="780" dirty="0">
+                <a:solidFill>
+                  <a:srgbClr val="1F2328"/>
+                </a:solidFill>
+                <a:latin typeface="Arial" pitchFamily="34" charset="0"/>
+                <a:ea typeface="Arial" pitchFamily="34" charset="-122"/>
+                <a:cs typeface="Arial" pitchFamily="34" charset="-120"/>
+              </a:rPr>
+              <a:t>Drawings, BOMs, current piece costs and benchmark data are pulled together by hand before a workshop can be held.</a:t>
+            </a:r>
+            <a:endParaRPr lang="en-US" sz="780" dirty="0"/>
           </a:p>
           <a:p>
             <a:pPr marL="342900" indent="-342900">
               <a:lnSpc>
-                <a:spcPct val="95000"/>
-              </a:lnSpc>
-              <a:spcAft>
-                <a:spcPts val="100"/>
-              </a:spcAft>
+                <a:spcPct val="93000"/>
+              </a:lnSpc>
               <a:buSzPct val="100000"/>
               <a:buChar char="•"/>
             </a:pPr>
             <a:r>
-              <a:rPr lang="en-US" sz="820" dirty="0">
-                <a:solidFill>
-                  <a:srgbClr val="1F2328"/>
-                </a:solidFill>
-                <a:latin typeface="Arial" pitchFamily="34" charset="0"/>
-                <a:ea typeface="Arial" pitchFamily="34" charset="-122"/>
-                <a:cs typeface="Arial" pitchFamily="34" charset="-120"/>
-              </a:rPr>
-              <a:t>The workshop itself takes eight to fifteen people off the job for one or two days.</a:t>
-            </a:r>
-            <a:endParaRPr lang="en-US" sz="820" dirty="0"/>
+              <a:rPr lang="en-US" sz="780" b="1" dirty="0">
+                <a:solidFill>
+                  <a:srgbClr val="1F2328"/>
+                </a:solidFill>
+                <a:latin typeface="Arial" pitchFamily="34" charset="0"/>
+                <a:ea typeface="Arial" pitchFamily="34" charset="-122"/>
+                <a:cs typeface="Arial" pitchFamily="34" charset="-120"/>
+              </a:rPr>
+              <a:t>Then the workshop itself, </a:t>
+            </a:r>
+            <a:pPr indent="0" marL="0">
+              <a:lnSpc>
+                <a:spcPct val="93000"/>
+              </a:lnSpc>
+              <a:spcAft>
+                <a:spcPts val="50"/>
+              </a:spcAft>
+              <a:buNone/>
+            </a:pPr>
+            <a:r>
+              <a:rPr lang="en-US" sz="780" dirty="0">
+                <a:solidFill>
+                  <a:srgbClr val="1F2328"/>
+                </a:solidFill>
+                <a:latin typeface="Arial" pitchFamily="34" charset="0"/>
+                <a:ea typeface="Arial" pitchFamily="34" charset="-122"/>
+                <a:cs typeface="Arial" pitchFamily="34" charset="-120"/>
+              </a:rPr>
+              <a:t>taking eight to fifteen people off the job for one or two days, away from their normal work.</a:t>
+            </a:r>
+            <a:endParaRPr lang="en-US" sz="780" dirty="0"/>
           </a:p>
           <a:p>
             <a:pPr marL="342900" indent="-342900">
               <a:lnSpc>
-                <a:spcPct val="95000"/>
-              </a:lnSpc>
-              <a:spcAft>
-                <a:spcPts val="100"/>
-              </a:spcAft>
+                <a:spcPct val="93000"/>
+              </a:lnSpc>
               <a:buSzPct val="100000"/>
               <a:buChar char="•"/>
             </a:pPr>
             <a:r>
-              <a:rPr lang="en-US" sz="820" dirty="0">
-                <a:solidFill>
-                  <a:srgbClr val="1F2328"/>
-                </a:solidFill>
-                <a:latin typeface="Arial" pitchFamily="34" charset="0"/>
-                <a:ea typeface="Arial" pitchFamily="34" charset="-122"/>
-                <a:cs typeface="Arial" pitchFamily="34" charset="-120"/>
-              </a:rPr>
-              <a:t>Afterwards the organiser goes back to each person to ask what they actually meant, whether it can be done, and what it might save. Many never reply, and those ideas quietly die.</a:t>
-            </a:r>
-            <a:endParaRPr lang="en-US" sz="820" dirty="0"/>
+              <a:rPr lang="en-US" sz="780" b="1" dirty="0">
+                <a:solidFill>
+                  <a:srgbClr val="1F2328"/>
+                </a:solidFill>
+                <a:latin typeface="Arial" pitchFamily="34" charset="0"/>
+                <a:ea typeface="Arial" pitchFamily="34" charset="-122"/>
+                <a:cs typeface="Arial" pitchFamily="34" charset="-120"/>
+              </a:rPr>
+              <a:t>Then weeks of chasing. </a:t>
+            </a:r>
+            <a:pPr indent="0" marL="0">
+              <a:lnSpc>
+                <a:spcPct val="93000"/>
+              </a:lnSpc>
+              <a:spcAft>
+                <a:spcPts val="50"/>
+              </a:spcAft>
+              <a:buNone/>
+            </a:pPr>
+            <a:r>
+              <a:rPr lang="en-US" sz="780" dirty="0">
+                <a:solidFill>
+                  <a:srgbClr val="1F2328"/>
+                </a:solidFill>
+                <a:latin typeface="Arial" pitchFamily="34" charset="0"/>
+                <a:ea typeface="Arial" pitchFamily="34" charset="-122"/>
+                <a:cs typeface="Arial" pitchFamily="34" charset="-120"/>
+              </a:rPr>
+              <a:t>Each author is asked what they meant, whether it can be done and what it saves. Many never reply, and those ideas quietly die.</a:t>
+            </a:r>
+            <a:endParaRPr lang="en-US" sz="780" dirty="0"/>
           </a:p>
           <a:p>
             <a:pPr marL="342900" indent="-342900">
               <a:lnSpc>
-                <a:spcPct val="95000"/>
-              </a:lnSpc>
-              <a:spcAft>
-                <a:spcPts val="100"/>
-              </a:spcAft>
+                <a:spcPct val="93000"/>
+              </a:lnSpc>
               <a:buSzPct val="100000"/>
               <a:buChar char="•"/>
             </a:pPr>
             <a:r>
-              <a:rPr lang="en-US" sz="820" dirty="0">
-                <a:solidFill>
-                  <a:srgbClr val="1F2328"/>
-                </a:solidFill>
-                <a:latin typeface="Arial" pitchFamily="34" charset="0"/>
-                <a:ea typeface="Arial" pitchFamily="34" charset="-122"/>
-                <a:cs typeface="Arial" pitchFamily="34" charset="-120"/>
-              </a:rPr>
-              <a:t>Savings are a judgement call rather than a calculation, so Finance discounts them. The number that reaches the plan is never the number on the sheet.</a:t>
-            </a:r>
-            <a:endParaRPr lang="en-US" sz="820" dirty="0"/>
-          </a:p>
-          <a:p>
-            <a:pPr marL="342900" indent="-342900">
-              <a:lnSpc>
-                <a:spcPct val="95000"/>
+              <a:rPr lang="en-US" sz="780" b="1" dirty="0">
+                <a:solidFill>
+                  <a:srgbClr val="1F2328"/>
+                </a:solidFill>
+                <a:latin typeface="Arial" pitchFamily="34" charset="0"/>
+                <a:ea typeface="Arial" pitchFamily="34" charset="-122"/>
+                <a:cs typeface="Arial" pitchFamily="34" charset="-120"/>
+              </a:rPr>
+              <a:t>Coverage follows the room. </a:t>
+            </a:r>
+            <a:pPr indent="0" marL="0">
+              <a:lnSpc>
+                <a:spcPct val="93000"/>
               </a:lnSpc>
               <a:spcAft>
-                <a:spcPts val="100"/>
+                <a:spcPts val="50"/>
               </a:spcAft>
-              <a:buSzPct val="100000"/>
-              <a:buChar char="•"/>
-            </a:pPr>
-            <a:r>
-              <a:rPr lang="en-US" sz="820" dirty="0">
-                <a:solidFill>
-                  <a:srgbClr val="1F2328"/>
-                </a:solidFill>
-                <a:latin typeface="Arial" pitchFamily="34" charset="0"/>
-                <a:ea typeface="Arial" pitchFamily="34" charset="-122"/>
-                <a:cs typeface="Arial" pitchFamily="34" charset="-120"/>
-              </a:rPr>
-              <a:t>None of it is written down in a way the next programme can use, so the work is repeated.</a:t>
-            </a:r>
-            <a:endParaRPr lang="en-US" sz="820" dirty="0"/>
+              <a:buNone/>
+            </a:pPr>
+            <a:r>
+              <a:rPr lang="en-US" sz="780" dirty="0">
+                <a:solidFill>
+                  <a:srgbClr val="1F2328"/>
+                </a:solidFill>
+                <a:latin typeface="Arial" pitchFamily="34" charset="0"/>
+                <a:ea typeface="Arial" pitchFamily="34" charset="-122"/>
+                <a:cs typeface="Arial" pitchFamily="34" charset="-120"/>
+              </a:rPr>
+              <a:t>Whole commodities are skipped because nobody who attended knew them well enough to challenge them.</a:t>
+            </a:r>
+            <a:endParaRPr lang="en-US" sz="780" dirty="0"/>
           </a:p>
         </p:txBody>
       </p:sp>
@@ -1465,12 +1652,12 @@
         </p:nvSpPr>
         <p:spPr>
           <a:xfrm>
-            <a:off x="228600" y="4142232"/>
-            <a:ext cx="5989320" cy="2487168"/>
+            <a:off x="228600" y="4123944"/>
+            <a:ext cx="5989320" cy="2505456"/>
           </a:xfrm>
           <a:prstGeom prst="roundRect">
             <a:avLst>
-              <a:gd name="adj" fmla="val 3309"/>
+              <a:gd name="adj" fmla="val 3285"/>
             </a:avLst>
           </a:prstGeom>
           <a:solidFill>
@@ -1492,7 +1679,7 @@
         </p:nvSpPr>
         <p:spPr>
           <a:xfrm>
-            <a:off x="438912" y="4233672"/>
+            <a:off x="438912" y="4215384"/>
             <a:ext cx="3108960" cy="219456"/>
           </a:xfrm>
           <a:prstGeom prst="rect">
@@ -1531,8 +1718,8 @@
         </p:nvSpPr>
         <p:spPr>
           <a:xfrm>
-            <a:off x="438912" y="4489704"/>
-            <a:ext cx="5568696" cy="2112264"/>
+            <a:off x="438912" y="4471416"/>
+            <a:ext cx="5568696" cy="2121408"/>
           </a:xfrm>
           <a:prstGeom prst="rect">
             <a:avLst/>
@@ -1546,194 +1733,289 @@
           <a:p>
             <a:pPr marL="342900" indent="-342900">
               <a:lnSpc>
-                <a:spcPct val="95000"/>
-              </a:lnSpc>
-              <a:spcAft>
-                <a:spcPts val="100"/>
-              </a:spcAft>
+                <a:spcPct val="93000"/>
+              </a:lnSpc>
               <a:buSzPct val="100000"/>
               <a:buChar char="•"/>
             </a:pPr>
             <a:r>
-              <a:rPr lang="en-US" sz="820" dirty="0">
-                <a:solidFill>
-                  <a:srgbClr val="1F2328"/>
-                </a:solidFill>
-                <a:latin typeface="Arial" pitchFamily="34" charset="0"/>
-                <a:ea typeface="Arial" pitchFamily="34" charset="-122"/>
-                <a:cs typeface="Arial" pitchFamily="34" charset="-120"/>
-              </a:rPr>
-              <a:t>Upload the 3D CAD and the 2D drawings for a part or an assembly. The geometry, material, tolerances and finishes are read from the files — nobody types them in.</a:t>
-            </a:r>
-            <a:endParaRPr lang="en-US" sz="820" dirty="0"/>
+              <a:rPr lang="en-US" sz="780" b="1" dirty="0">
+                <a:solidFill>
+                  <a:srgbClr val="1F2328"/>
+                </a:solidFill>
+                <a:latin typeface="Arial" pitchFamily="34" charset="0"/>
+                <a:ea typeface="Arial" pitchFamily="34" charset="-122"/>
+                <a:cs typeface="Arial" pitchFamily="34" charset="-120"/>
+              </a:rPr>
+              <a:t>Upload the CAD and the drawings. </a:t>
+            </a:r>
+            <a:pPr indent="0" marL="0">
+              <a:lnSpc>
+                <a:spcPct val="93000"/>
+              </a:lnSpc>
+              <a:spcAft>
+                <a:spcPts val="50"/>
+              </a:spcAft>
+              <a:buNone/>
+            </a:pPr>
+            <a:r>
+              <a:rPr lang="en-US" sz="780" dirty="0">
+                <a:solidFill>
+                  <a:srgbClr val="1F2328"/>
+                </a:solidFill>
+                <a:latin typeface="Arial" pitchFamily="34" charset="0"/>
+                <a:ea typeface="Arial" pitchFamily="34" charset="-122"/>
+                <a:cs typeface="Arial" pitchFamily="34" charset="-120"/>
+              </a:rPr>
+              <a:t>Geometry, material, tolerances and finishes are read from the files, for a single part or a whole assembly. Nobody types them in.</a:t>
+            </a:r>
+            <a:endParaRPr lang="en-US" sz="780" dirty="0"/>
           </a:p>
           <a:p>
             <a:pPr marL="342900" indent="-342900">
               <a:lnSpc>
-                <a:spcPct val="95000"/>
-              </a:lnSpc>
-              <a:spcAft>
-                <a:spcPts val="100"/>
-              </a:spcAft>
+                <a:spcPct val="93000"/>
+              </a:lnSpc>
               <a:buSzPct val="100000"/>
               <a:buChar char="•"/>
             </a:pPr>
             <a:r>
-              <a:rPr lang="en-US" sz="820" dirty="0">
-                <a:solidFill>
-                  <a:srgbClr val="1F2328"/>
-                </a:solidFill>
-                <a:latin typeface="Arial" pitchFamily="34" charset="0"/>
-                <a:ea typeface="Arial" pitchFamily="34" charset="-122"/>
-                <a:cs typeface="Arial" pitchFamily="34" charset="-120"/>
-              </a:rPr>
-              <a:t>Should-Cost builds the piece price from the bottom up: material, cycle time, tooling and overhead. Every idea is then measured against that number instead of against an opinion.</a:t>
-            </a:r>
-            <a:endParaRPr lang="en-US" sz="820" dirty="0"/>
+              <a:rPr lang="en-US" sz="780" b="1" dirty="0">
+                <a:solidFill>
+                  <a:srgbClr val="1F2328"/>
+                </a:solidFill>
+                <a:latin typeface="Arial" pitchFamily="34" charset="0"/>
+                <a:ea typeface="Arial" pitchFamily="34" charset="-122"/>
+                <a:cs typeface="Arial" pitchFamily="34" charset="-120"/>
+              </a:rPr>
+              <a:t>Should-Cost sets the baseline. </a:t>
+            </a:r>
+            <a:pPr indent="0" marL="0">
+              <a:lnSpc>
+                <a:spcPct val="93000"/>
+              </a:lnSpc>
+              <a:spcAft>
+                <a:spcPts val="50"/>
+              </a:spcAft>
+              <a:buNone/>
+            </a:pPr>
+            <a:r>
+              <a:rPr lang="en-US" sz="780" dirty="0">
+                <a:solidFill>
+                  <a:srgbClr val="1F2328"/>
+                </a:solidFill>
+                <a:latin typeface="Arial" pitchFamily="34" charset="0"/>
+                <a:ea typeface="Arial" pitchFamily="34" charset="-122"/>
+                <a:cs typeface="Arial" pitchFamily="34" charset="-120"/>
+              </a:rPr>
+              <a:t>It builds the piece price from the bottom up — material, cycle time, tooling and overhead — so every idea is measured against a number rather than an opinion.</a:t>
+            </a:r>
+            <a:endParaRPr lang="en-US" sz="780" dirty="0"/>
           </a:p>
           <a:p>
             <a:pPr marL="342900" indent="-342900">
               <a:lnSpc>
-                <a:spcPct val="95000"/>
-              </a:lnSpc>
-              <a:spcAft>
-                <a:spcPts val="100"/>
-              </a:spcAft>
+                <a:spcPct val="93000"/>
+              </a:lnSpc>
               <a:buSzPct val="100000"/>
               <a:buChar char="•"/>
             </a:pPr>
             <a:r>
-              <a:rPr lang="en-US" sz="820" dirty="0">
-                <a:solidFill>
-                  <a:srgbClr val="1F2328"/>
-                </a:solidFill>
-                <a:latin typeface="Arial" pitchFamily="34" charset="0"/>
-                <a:ea typeface="Arial" pitchFamily="34" charset="-122"/>
-                <a:cs typeface="Arial" pitchFamily="34" charset="-120"/>
-              </a:rPr>
-              <a:t>Prism takes one part and shows where its price really sits — what the design costs, what the specification costs, what the chosen process costs and what the sourcing location costs. That tells you which line of a supplier quote to argue with.</a:t>
-            </a:r>
-            <a:endParaRPr lang="en-US" sz="820" dirty="0"/>
+              <a:rPr lang="en-US" sz="780" b="1" dirty="0">
+                <a:solidFill>
+                  <a:srgbClr val="1F2328"/>
+                </a:solidFill>
+                <a:latin typeface="Arial" pitchFamily="34" charset="0"/>
+                <a:ea typeface="Arial" pitchFamily="34" charset="-122"/>
+                <a:cs typeface="Arial" pitchFamily="34" charset="-120"/>
+              </a:rPr>
+              <a:t>Prism shows where the price sits. </a:t>
+            </a:r>
+            <a:pPr indent="0" marL="0">
+              <a:lnSpc>
+                <a:spcPct val="93000"/>
+              </a:lnSpc>
+              <a:spcAft>
+                <a:spcPts val="50"/>
+              </a:spcAft>
+              <a:buNone/>
+            </a:pPr>
+            <a:r>
+              <a:rPr lang="en-US" sz="780" dirty="0">
+                <a:solidFill>
+                  <a:srgbClr val="1F2328"/>
+                </a:solidFill>
+                <a:latin typeface="Arial" pitchFamily="34" charset="0"/>
+                <a:ea typeface="Arial" pitchFamily="34" charset="-122"/>
+                <a:cs typeface="Arial" pitchFamily="34" charset="-120"/>
+              </a:rPr>
+              <a:t>It splits one part into what the design costs, what the specification costs, what the chosen process costs and what the sourcing location costs, so you know which line of a supplier quote to argue with.</a:t>
+            </a:r>
+            <a:endParaRPr lang="en-US" sz="780" dirty="0"/>
           </a:p>
           <a:p>
             <a:pPr marL="342900" indent="-342900">
               <a:lnSpc>
-                <a:spcPct val="95000"/>
-              </a:lnSpc>
-              <a:spcAft>
-                <a:spcPts val="100"/>
-              </a:spcAft>
+                <a:spcPct val="93000"/>
+              </a:lnSpc>
               <a:buSzPct val="100000"/>
               <a:buChar char="•"/>
             </a:pPr>
             <a:r>
-              <a:rPr lang="en-US" sz="820" dirty="0">
-                <a:solidFill>
-                  <a:srgbClr val="1F2328"/>
-                </a:solidFill>
-                <a:latin typeface="Arial" pitchFamily="34" charset="0"/>
-                <a:ea typeface="Arial" pitchFamily="34" charset="-122"/>
-                <a:cs typeface="Arial" pitchFamily="34" charset="-120"/>
-              </a:rPr>
-              <a:t>DFM / DFA Studio reads the model and points out what will be awkward or expensive to make and assemble — thin walls, undercuts, missing draft, too many fasteners — while the design can still be changed.</a:t>
-            </a:r>
-            <a:endParaRPr lang="en-US" sz="820" dirty="0"/>
+              <a:rPr lang="en-US" sz="780" b="1" dirty="0">
+                <a:solidFill>
+                  <a:srgbClr val="1F2328"/>
+                </a:solidFill>
+                <a:latin typeface="Arial" pitchFamily="34" charset="0"/>
+                <a:ea typeface="Arial" pitchFamily="34" charset="-122"/>
+                <a:cs typeface="Arial" pitchFamily="34" charset="-120"/>
+              </a:rPr>
+              <a:t>DFM / DFA Studio reads the model, </a:t>
+            </a:r>
+            <a:pPr indent="0" marL="0">
+              <a:lnSpc>
+                <a:spcPct val="93000"/>
+              </a:lnSpc>
+              <a:spcAft>
+                <a:spcPts val="50"/>
+              </a:spcAft>
+              <a:buNone/>
+            </a:pPr>
+            <a:r>
+              <a:rPr lang="en-US" sz="780" dirty="0">
+                <a:solidFill>
+                  <a:srgbClr val="1F2328"/>
+                </a:solidFill>
+                <a:latin typeface="Arial" pitchFamily="34" charset="0"/>
+                <a:ea typeface="Arial" pitchFamily="34" charset="-122"/>
+                <a:cs typeface="Arial" pitchFamily="34" charset="-120"/>
+              </a:rPr>
+              <a:t>flagging what will be awkward or expensive to make and assemble — thin walls, undercuts, missing draft, too many fasteners — while the design can still change.</a:t>
+            </a:r>
+            <a:endParaRPr lang="en-US" sz="780" dirty="0"/>
           </a:p>
           <a:p>
             <a:pPr marL="342900" indent="-342900">
               <a:lnSpc>
-                <a:spcPct val="95000"/>
-              </a:lnSpc>
-              <a:spcAft>
-                <a:spcPts val="100"/>
-              </a:spcAft>
+                <a:spcPct val="93000"/>
+              </a:lnSpc>
               <a:buSzPct val="100000"/>
               <a:buChar char="•"/>
             </a:pPr>
             <a:r>
-              <a:rPr lang="en-US" sz="820" dirty="0">
-                <a:solidFill>
-                  <a:srgbClr val="1F2328"/>
-                </a:solidFill>
-                <a:latin typeface="Arial" pitchFamily="34" charset="0"/>
-                <a:ea typeface="Arial" pitchFamily="34" charset="-122"/>
-                <a:cs typeface="Arial" pitchFamily="34" charset="-120"/>
-              </a:rPr>
-              <a:t>Innovation Studio and TRIZ Studio do the idea generation itself: eight structured value engineering methods, plus a method for breaking a cost-versus-performance trade-off rather than accepting it.</a:t>
-            </a:r>
-            <a:endParaRPr lang="en-US" sz="820" dirty="0"/>
+              <a:rPr lang="en-US" sz="780" b="1" dirty="0">
+                <a:solidFill>
+                  <a:srgbClr val="1F2328"/>
+                </a:solidFill>
+                <a:latin typeface="Arial" pitchFamily="34" charset="0"/>
+                <a:ea typeface="Arial" pitchFamily="34" charset="-122"/>
+                <a:cs typeface="Arial" pitchFamily="34" charset="-120"/>
+              </a:rPr>
+              <a:t>Innovation Studio and TRIZ Studio generate the ideas; </a:t>
+            </a:r>
+            <a:pPr indent="0" marL="0">
+              <a:lnSpc>
+                <a:spcPct val="93000"/>
+              </a:lnSpc>
+              <a:spcAft>
+                <a:spcPts val="50"/>
+              </a:spcAft>
+              <a:buNone/>
+            </a:pPr>
+            <a:r>
+              <a:rPr lang="en-US" sz="780" dirty="0">
+                <a:solidFill>
+                  <a:srgbClr val="1F2328"/>
+                </a:solidFill>
+                <a:latin typeface="Arial" pitchFamily="34" charset="0"/>
+                <a:ea typeface="Arial" pitchFamily="34" charset="-122"/>
+                <a:cs typeface="Arial" pitchFamily="34" charset="-120"/>
+              </a:rPr>
+              <a:t>eight structured value engineering methods, plus a way of breaking a cost-versus-performance trade-off rather than accepting it. Horizon checks the decision against where the technology is going.</a:t>
+            </a:r>
+            <a:endParaRPr lang="en-US" sz="780" dirty="0"/>
           </a:p>
           <a:p>
             <a:pPr marL="342900" indent="-342900">
               <a:lnSpc>
-                <a:spcPct val="95000"/>
-              </a:lnSpc>
-              <a:spcAft>
-                <a:spcPts val="100"/>
-              </a:spcAft>
+                <a:spcPct val="93000"/>
+              </a:lnSpc>
               <a:buSzPct val="100000"/>
               <a:buChar char="•"/>
             </a:pPr>
             <a:r>
-              <a:rPr lang="en-US" sz="820" dirty="0">
-                <a:solidFill>
-                  <a:srgbClr val="1F2328"/>
-                </a:solidFill>
-                <a:latin typeface="Arial" pitchFamily="34" charset="0"/>
-                <a:ea typeface="Arial" pitchFamily="34" charset="-122"/>
-                <a:cs typeface="Arial" pitchFamily="34" charset="-120"/>
-              </a:rPr>
-              <a:t>Horizon looks a few years out, so a decision taken now is not overtaken by where the technology is going.</a:t>
-            </a:r>
-            <a:endParaRPr lang="en-US" sz="820" dirty="0"/>
+              <a:rPr lang="en-US" sz="780" b="1" dirty="0">
+                <a:solidFill>
+                  <a:srgbClr val="1F2328"/>
+                </a:solidFill>
+                <a:latin typeface="Arial" pitchFamily="34" charset="0"/>
+                <a:ea typeface="Arial" pitchFamily="34" charset="-122"/>
+                <a:cs typeface="Arial" pitchFamily="34" charset="-120"/>
+              </a:rPr>
+              <a:t>Ideas come at four levels </a:t>
+            </a:r>
+            <a:pPr indent="0" marL="0">
+              <a:lnSpc>
+                <a:spcPct val="93000"/>
+              </a:lnSpc>
+              <a:spcAft>
+                <a:spcPts val="50"/>
+              </a:spcAft>
+              <a:buNone/>
+            </a:pPr>
+            <a:r>
+              <a:rPr lang="en-US" sz="780" dirty="0">
+                <a:solidFill>
+                  <a:srgbClr val="1F2328"/>
+                </a:solidFill>
+                <a:latin typeface="Arial" pitchFamily="34" charset="0"/>
+                <a:ea typeface="Arial" pitchFamily="34" charset="-122"/>
+                <a:cs typeface="Arial" pitchFamily="34" charset="-120"/>
+              </a:rPr>
+              <a:t>— assembly, sub-assembly, part, technology — each naming the change, the process, the material and the saving per part, across every commodity.</a:t>
+            </a:r>
+            <a:endParaRPr lang="en-US" sz="780" dirty="0"/>
           </a:p>
           <a:p>
             <a:pPr marL="342900" indent="-342900">
               <a:lnSpc>
-                <a:spcPct val="95000"/>
-              </a:lnSpc>
-              <a:spcAft>
-                <a:spcPts val="100"/>
-              </a:spcAft>
+                <a:spcPct val="93000"/>
+              </a:lnSpc>
               <a:buSzPct val="100000"/>
               <a:buChar char="•"/>
             </a:pPr>
             <a:r>
-              <a:rPr lang="en-US" sz="820" dirty="0">
-                <a:solidFill>
-                  <a:srgbClr val="1F2328"/>
-                </a:solidFill>
-                <a:latin typeface="Arial" pitchFamily="34" charset="0"/>
-                <a:ea typeface="Arial" pitchFamily="34" charset="-122"/>
-                <a:cs typeface="Arial" pitchFamily="34" charset="-120"/>
-              </a:rPr>
-              <a:t>Ideas come back at four levels — whole assembly, sub-assembly, single part, and the technology itself — each naming the change, the process, the material and what it saves per part, across every commodity from BIW and chassis to battery, interior and harness.</a:t>
-            </a:r>
-            <a:endParaRPr lang="en-US" sz="820" dirty="0"/>
-          </a:p>
-          <a:p>
-            <a:pPr marL="342900" indent="-342900">
-              <a:lnSpc>
-                <a:spcPct val="95000"/>
+              <a:rPr lang="en-US" sz="780" b="1" dirty="0">
+                <a:solidFill>
+                  <a:srgbClr val="1F2328"/>
+                </a:solidFill>
+                <a:latin typeface="Arial" pitchFamily="34" charset="0"/>
+                <a:ea typeface="Arial" pitchFamily="34" charset="-122"/>
+                <a:cs typeface="Arial" pitchFamily="34" charset="-120"/>
+              </a:rPr>
+              <a:t>The saving is always calculated </a:t>
+            </a:r>
+            <a:pPr indent="0" marL="0">
+              <a:lnSpc>
+                <a:spcPct val="93000"/>
               </a:lnSpc>
               <a:spcAft>
-                <a:spcPts val="100"/>
+                <a:spcPts val="50"/>
               </a:spcAft>
-              <a:buSzPct val="100000"/>
-              <a:buChar char="•"/>
-            </a:pPr>
-            <a:r>
-              <a:rPr lang="en-US" sz="820" dirty="0">
-                <a:solidFill>
-                  <a:srgbClr val="1F2328"/>
-                </a:solidFill>
-                <a:latin typeface="Arial" pitchFamily="34" charset="0"/>
-                <a:ea typeface="Arial" pitchFamily="34" charset="-122"/>
-                <a:cs typeface="Arial" pitchFamily="34" charset="-120"/>
-              </a:rPr>
-              <a:t>The AI writes the idea and the explanation. The saving is always calculated by the cost engine, and every idea says whether the engine confirmed it, contradicted it, or could not check it and why.</a:t>
-            </a:r>
-            <a:endParaRPr lang="en-US" sz="820" dirty="0"/>
+              <a:buNone/>
+            </a:pPr>
+            <a:r>
+              <a:rPr lang="en-US" sz="780" dirty="0">
+                <a:solidFill>
+                  <a:srgbClr val="1F2328"/>
+                </a:solidFill>
+                <a:latin typeface="Arial" pitchFamily="34" charset="0"/>
+                <a:ea typeface="Arial" pitchFamily="34" charset="-122"/>
+                <a:cs typeface="Arial" pitchFamily="34" charset="-120"/>
+              </a:rPr>
+              <a:t>by the cost engine, and every idea says whether it was confirmed, contradicted, or could not be checked and why. The AI writes the idea; it never supplies the number.</a:t>
+            </a:r>
+            <a:endParaRPr lang="en-US" sz="780" dirty="0"/>
           </a:p>
         </p:txBody>
       </p:sp>
@@ -1746,11 +2028,11 @@
         <p:spPr>
           <a:xfrm>
             <a:off x="6355080" y="859536"/>
-            <a:ext cx="2788920" cy="1508760"/>
+            <a:ext cx="2788920" cy="1554480"/>
           </a:xfrm>
           <a:prstGeom prst="roundRect">
             <a:avLst>
-              <a:gd name="adj" fmla="val 5455"/>
+              <a:gd name="adj" fmla="val 5294"/>
             </a:avLst>
           </a:prstGeom>
           <a:solidFill>
@@ -1848,6 +2130,29 @@
               <a:lnSpc>
                 <a:spcPct val="94000"/>
               </a:lnSpc>
+              <a:spcAft>
+                <a:spcPts val="300"/>
+              </a:spcAft>
+              <a:buNone/>
+            </a:pPr>
+            <a:r>
+              <a:rPr lang="en-US" sz="740" dirty="0">
+                <a:solidFill>
+                  <a:srgbClr val="5B6570"/>
+                </a:solidFill>
+                <a:latin typeface="Arial" pitchFamily="34" charset="0"/>
+                <a:ea typeface="Arial" pitchFamily="34" charset="-122"/>
+                <a:cs typeface="Arial" pitchFamily="34" charset="-120"/>
+              </a:rPr>
+              <a:t>Hosting and API usage. No new hardware and no licences.</a:t>
+            </a:r>
+            <a:endParaRPr lang="en-US" sz="950" dirty="0"/>
+          </a:p>
+          <a:p>
+            <a:pPr indent="0" marL="0">
+              <a:lnSpc>
+                <a:spcPct val="94000"/>
+              </a:lnSpc>
               <a:buNone/>
             </a:pPr>
             <a:r>
@@ -1859,7 +2164,7 @@
                 <a:ea typeface="Arial" pitchFamily="34" charset="-122"/>
                 <a:cs typeface="Arial" pitchFamily="34" charset="-120"/>
               </a:rPr>
-              <a:t>Return:</a:t>
+              <a:t>Return: £</a:t>
             </a:r>
             <a:endParaRPr lang="en-US" sz="950" dirty="0"/>
           </a:p>
@@ -1891,7 +2196,7 @@
               <a:buNone/>
             </a:pPr>
             <a:r>
-              <a:rPr lang="en-US" sz="740" i="1" dirty="0">
+              <a:rPr lang="en-US" sz="720" i="1" dirty="0">
                 <a:solidFill>
                   <a:srgbClr val="5B6570"/>
                 </a:solidFill>
@@ -1899,7 +2204,27 @@
                 <a:ea typeface="Arial" pitchFamily="34" charset="-122"/>
                 <a:cs typeface="Arial" pitchFamily="34" charset="-120"/>
               </a:rPr>
-              <a:t>Engineer hours released × loaded rate, plus the savings the engine confirms × annual volume.</a:t>
+              <a:t>( engineer hours released per week × loaded rate × weeks )</a:t>
+            </a:r>
+            <a:endParaRPr lang="en-US" sz="950" dirty="0"/>
+          </a:p>
+          <a:p>
+            <a:pPr indent="0" marL="0">
+              <a:lnSpc>
+                <a:spcPct val="94000"/>
+              </a:lnSpc>
+              <a:buNone/>
+            </a:pPr>
+            <a:r>
+              <a:rPr lang="en-US" sz="720" i="1" dirty="0">
+                <a:solidFill>
+                  <a:srgbClr val="5B6570"/>
+                </a:solidFill>
+                <a:latin typeface="Arial" pitchFamily="34" charset="0"/>
+                <a:ea typeface="Arial" pitchFamily="34" charset="-122"/>
+                <a:cs typeface="Arial" pitchFamily="34" charset="-120"/>
+              </a:rPr>
+              <a:t>+ ( saving per part the engine confirms × annual volume )</a:t>
             </a:r>
             <a:endParaRPr lang="en-US" sz="950" dirty="0"/>
           </a:p>
@@ -1913,7 +2238,7 @@
         </p:nvSpPr>
         <p:spPr>
           <a:xfrm>
-            <a:off x="6355080" y="2441448"/>
+            <a:off x="6355080" y="2450592"/>
             <a:ext cx="2788920" cy="420624"/>
           </a:xfrm>
           <a:prstGeom prst="roundRect">
@@ -1940,7 +2265,7 @@
         </p:nvSpPr>
         <p:spPr>
           <a:xfrm>
-            <a:off x="6537960" y="2542032"/>
+            <a:off x="6537960" y="2551176"/>
             <a:ext cx="2377440" cy="219456"/>
           </a:xfrm>
           <a:prstGeom prst="rect">
@@ -1979,8 +2304,8 @@
         </p:nvSpPr>
         <p:spPr>
           <a:xfrm>
-            <a:off x="6355080" y="2935224"/>
-            <a:ext cx="2788920" cy="3694176"/>
+            <a:off x="6355080" y="2907792"/>
+            <a:ext cx="2788920" cy="2798064"/>
           </a:xfrm>
           <a:prstGeom prst="roundRect">
             <a:avLst>
@@ -2006,7 +2331,7 @@
         </p:nvSpPr>
         <p:spPr>
           <a:xfrm>
-            <a:off x="6537960" y="3026664"/>
+            <a:off x="6537960" y="2999232"/>
             <a:ext cx="2377440" cy="219456"/>
           </a:xfrm>
           <a:prstGeom prst="rect">
@@ -2045,8 +2370,8 @@
         </p:nvSpPr>
         <p:spPr>
           <a:xfrm>
-            <a:off x="6537960" y="3300984"/>
-            <a:ext cx="2423160" cy="3255264"/>
+            <a:off x="6537960" y="3255264"/>
+            <a:ext cx="2423160" cy="2432304"/>
           </a:xfrm>
           <a:prstGeom prst="rect">
             <a:avLst/>
@@ -2080,7 +2405,7 @@
                 <a:spcPct val="94000"/>
               </a:lnSpc>
               <a:spcAft>
-                <a:spcPts val="600"/>
+                <a:spcPts val="500"/>
               </a:spcAft>
               <a:buNone/>
             </a:pPr>
@@ -2113,14 +2438,14 @@
                 <a:ea typeface="Arial" pitchFamily="34" charset="-122"/>
                 <a:cs typeface="Arial" pitchFamily="34" charset="-120"/>
               </a:rPr>
-              <a:t>Much faster.  </a:t>
+              <a:t>Much faster, and usable.  </a:t>
             </a:r>
             <a:pPr indent="0" marL="0">
               <a:lnSpc>
                 <a:spcPct val="94000"/>
               </a:lnSpc>
               <a:spcAft>
-                <a:spcPts val="600"/>
+                <a:spcPts val="500"/>
               </a:spcAft>
               <a:buNone/>
             </a:pPr>
@@ -2133,7 +2458,7 @@
                 <a:ea typeface="Arial" pitchFamily="34" charset="-122"/>
                 <a:cs typeface="Arial" pitchFamily="34" charset="-120"/>
               </a:rPr>
-              <a:t>An idea arrives already written up and already costed, so there is nothing to chase afterwards.</a:t>
+              <a:t>An idea arrives already written up and costed, naming the change, the process, the material and the saving per part. Nothing to chase.</a:t>
             </a:r>
             <a:endParaRPr lang="en-US" sz="820" dirty="0"/>
           </a:p>
@@ -2153,14 +2478,14 @@
                 <a:ea typeface="Arial" pitchFamily="34" charset="-122"/>
                 <a:cs typeface="Arial" pitchFamily="34" charset="-120"/>
               </a:rPr>
-              <a:t>Better ideas.  </a:t>
+              <a:t>The same standard every time.  </a:t>
             </a:r>
             <a:pPr indent="0" marL="0">
               <a:lnSpc>
                 <a:spcPct val="94000"/>
               </a:lnSpc>
               <a:spcAft>
-                <a:spcPts val="600"/>
+                <a:spcPts val="500"/>
               </a:spcAft>
               <a:buNone/>
             </a:pPr>
@@ -2173,7 +2498,7 @@
                 <a:ea typeface="Arial" pitchFamily="34" charset="-122"/>
                 <a:cs typeface="Arial" pitchFamily="34" charset="-120"/>
               </a:rPr>
-              <a:t>Each one names the change, the process, the material and the saving per part.</a:t>
+              <a:t>It does not depend on who was available that week.</a:t>
             </a:r>
             <a:endParaRPr lang="en-US" sz="820" dirty="0"/>
           </a:p>
@@ -2193,14 +2518,14 @@
                 <a:ea typeface="Arial" pitchFamily="34" charset="-122"/>
                 <a:cs typeface="Arial" pitchFamily="34" charset="-120"/>
               </a:rPr>
-              <a:t>The same standard every time.  </a:t>
+              <a:t>Numbers Finance can check.  </a:t>
             </a:r>
             <a:pPr indent="0" marL="0">
               <a:lnSpc>
                 <a:spcPct val="94000"/>
               </a:lnSpc>
               <a:spcAft>
-                <a:spcPts val="600"/>
+                <a:spcPts val="500"/>
               </a:spcAft>
               <a:buNone/>
             </a:pPr>
@@ -2213,7 +2538,7 @@
                 <a:ea typeface="Arial" pitchFamily="34" charset="-122"/>
                 <a:cs typeface="Arial" pitchFamily="34" charset="-120"/>
               </a:rPr>
-              <a:t>It does not depend on who was available that week.</a:t>
+              <a:t>Every saving is calculated and the working is shown, so less of it gets discounted.</a:t>
             </a:r>
             <a:endParaRPr lang="en-US" sz="820" dirty="0"/>
           </a:p>
@@ -2233,54 +2558,14 @@
                 <a:ea typeface="Arial" pitchFamily="34" charset="-122"/>
                 <a:cs typeface="Arial" pitchFamily="34" charset="-120"/>
               </a:rPr>
-              <a:t>Numbers Finance can check.  </a:t>
+              <a:t>Nothing is lost.  </a:t>
             </a:r>
             <a:pPr indent="0" marL="0">
               <a:lnSpc>
                 <a:spcPct val="94000"/>
               </a:lnSpc>
               <a:spcAft>
-                <a:spcPts val="600"/>
-              </a:spcAft>
-              <a:buNone/>
-            </a:pPr>
-            <a:r>
-              <a:rPr lang="en-US" sz="820" dirty="0">
-                <a:solidFill>
-                  <a:srgbClr val="1F2328"/>
-                </a:solidFill>
-                <a:latin typeface="Arial" pitchFamily="34" charset="0"/>
-                <a:ea typeface="Arial" pitchFamily="34" charset="-122"/>
-                <a:cs typeface="Arial" pitchFamily="34" charset="-120"/>
-              </a:rPr>
-              <a:t>Every saving is calculated and the working is shown, so less of it gets discounted.</a:t>
-            </a:r>
-            <a:endParaRPr lang="en-US" sz="820" dirty="0"/>
-          </a:p>
-          <a:p>
-            <a:pPr indent="0" marL="0">
-              <a:lnSpc>
-                <a:spcPct val="94000"/>
-              </a:lnSpc>
-              <a:buNone/>
-            </a:pPr>
-            <a:r>
-              <a:rPr lang="en-US" sz="820" b="1" dirty="0">
-                <a:solidFill>
-                  <a:srgbClr val="1F2328"/>
-                </a:solidFill>
-                <a:latin typeface="Arial" pitchFamily="34" charset="0"/>
-                <a:ea typeface="Arial" pitchFamily="34" charset="-122"/>
-                <a:cs typeface="Arial" pitchFamily="34" charset="-120"/>
-              </a:rPr>
-              <a:t>Nothing is lost.  </a:t>
-            </a:r>
-            <a:pPr indent="0" marL="0">
-              <a:lnSpc>
-                <a:spcPct val="94000"/>
-              </a:lnSpc>
-              <a:spcAft>
-                <a:spcPts val="600"/>
+                <a:spcPts val="500"/>
               </a:spcAft>
               <a:buNone/>
             </a:pPr>
@@ -2344,12 +2629,138 @@
         </p:nvSpPr>
         <p:spPr>
           <a:xfrm>
-            <a:off x="9281160" y="859536"/>
-            <a:ext cx="2679192" cy="1508760"/>
+            <a:off x="6355080" y="5742432"/>
+            <a:ext cx="2788920" cy="886968"/>
           </a:xfrm>
           <a:prstGeom prst="roundRect">
             <a:avLst>
-              <a:gd name="adj" fmla="val 5455"/>
+              <a:gd name="adj" fmla="val 9278"/>
+            </a:avLst>
+          </a:prstGeom>
+          <a:solidFill>
+            <a:srgbClr val="DCE7DC"/>
+          </a:solidFill>
+          <a:ln w="9525">
+            <a:solidFill>
+              <a:srgbClr val="B9CDB9"/>
+            </a:solidFill>
+            <a:prstDash val="solid"/>
+          </a:ln>
+        </p:spPr>
+      </p:sp>
+      <p:sp>
+        <p:nvSpPr>
+          <p:cNvPr id="24" name="Text 22"/>
+          <p:cNvSpPr txBox="1"/>
+          <p:nvPr/>
+        </p:nvSpPr>
+        <p:spPr>
+          <a:xfrm>
+            <a:off x="6537960" y="5833872"/>
+            <a:ext cx="2423160" cy="749808"/>
+          </a:xfrm>
+          <a:prstGeom prst="rect">
+            <a:avLst/>
+          </a:prstGeom>
+          <a:noFill/>
+          <a:ln/>
+        </p:spPr>
+        <p:txBody>
+          <a:bodyPr wrap="square" lIns="0" tIns="0" rIns="0" bIns="0" rtlCol="0" anchor="t"/>
+          <a:lstStyle/>
+          <a:p>
+            <a:pPr indent="0" marL="0">
+              <a:lnSpc>
+                <a:spcPct val="93000"/>
+              </a:lnSpc>
+              <a:buNone/>
+            </a:pPr>
+            <a:r>
+              <a:rPr lang="en-US" sz="740" b="1" dirty="0">
+                <a:solidFill>
+                  <a:srgbClr val="1F2328"/>
+                </a:solidFill>
+                <a:latin typeface="Arial" pitchFamily="34" charset="0"/>
+                <a:ea typeface="Arial" pitchFamily="34" charset="-122"/>
+                <a:cs typeface="Arial" pitchFamily="34" charset="-120"/>
+              </a:rPr>
+              <a:t>Already measured.  </a:t>
+            </a:r>
+            <a:pPr indent="0" marL="0">
+              <a:lnSpc>
+                <a:spcPct val="93000"/>
+              </a:lnSpc>
+              <a:spcAft>
+                <a:spcPts val="300"/>
+              </a:spcAft>
+              <a:buNone/>
+            </a:pPr>
+            <a:r>
+              <a:rPr lang="en-US" sz="740" dirty="0">
+                <a:solidFill>
+                  <a:srgbClr val="1F2328"/>
+                </a:solidFill>
+                <a:latin typeface="Arial" pitchFamily="34" charset="0"/>
+                <a:ea typeface="Arial" pitchFamily="34" charset="-122"/>
+                <a:cs typeface="Arial" pitchFamily="34" charset="-120"/>
+              </a:rPr>
+              <a:t>Run against 16 reference parts held back from development: 15 landed inside tolerance, average error 11%.</a:t>
+            </a:r>
+            <a:endParaRPr lang="en-US" sz="740" dirty="0"/>
+          </a:p>
+          <a:p>
+            <a:pPr indent="0" marL="0">
+              <a:lnSpc>
+                <a:spcPct val="93000"/>
+              </a:lnSpc>
+              <a:buNone/>
+            </a:pPr>
+            <a:r>
+              <a:rPr lang="en-US" sz="740" b="1" dirty="0">
+                <a:solidFill>
+                  <a:srgbClr val="1F2328"/>
+                </a:solidFill>
+                <a:latin typeface="Arial" pitchFamily="34" charset="0"/>
+                <a:ea typeface="Arial" pitchFamily="34" charset="-122"/>
+                <a:cs typeface="Arial" pitchFamily="34" charset="-120"/>
+              </a:rPr>
+              <a:t>What we are asking for.  </a:t>
+            </a:r>
+            <a:pPr indent="0" marL="0">
+              <a:lnSpc>
+                <a:spcPct val="93000"/>
+              </a:lnSpc>
+              <a:buNone/>
+            </a:pPr>
+            <a:r>
+              <a:rPr lang="en-US" sz="740" dirty="0">
+                <a:solidFill>
+                  <a:srgbClr val="1F2328"/>
+                </a:solidFill>
+                <a:latin typeface="Arial" pitchFamily="34" charset="0"/>
+                <a:ea typeface="Arial" pitchFamily="34" charset="-122"/>
+                <a:cs typeface="Arial" pitchFamily="34" charset="-120"/>
+              </a:rPr>
+              <a:t>A pilot on one part family — about twenty parts already costed by hand, run in parallel and judged by comparing the two sets of numbers.</a:t>
+            </a:r>
+            <a:endParaRPr lang="en-US" sz="740" dirty="0"/>
+          </a:p>
+        </p:txBody>
+      </p:sp>
+      <p:sp>
+        <p:nvSpPr>
+          <p:cNvPr id="25" name="Shape 23"/>
+          <p:cNvSpPr/>
+          <p:nvPr/>
+        </p:nvSpPr>
+        <p:spPr>
+          <a:xfrm>
+            <a:off x="9281160" y="859536"/>
+            <a:ext cx="2679192" cy="1554480"/>
+          </a:xfrm>
+          <a:prstGeom prst="roundRect">
+            <a:avLst>
+              <a:gd name="adj" fmla="val 5294"/>
             </a:avLst>
           </a:prstGeom>
           <a:solidFill>
@@ -2365,7 +2776,7 @@
       </p:sp>
       <p:sp>
         <p:nvSpPr>
-          <p:cNvPr id="24" name="Text 22"/>
+          <p:cNvPr id="26" name="Text 24"/>
           <p:cNvSpPr txBox="1"/>
           <p:nvPr/>
         </p:nvSpPr>
@@ -2404,7 +2815,7 @@
       </p:sp>
       <p:sp>
         <p:nvSpPr>
-          <p:cNvPr id="25" name="Text 23"/>
+          <p:cNvPr id="27" name="Text 25"/>
           <p:cNvSpPr txBox="1"/>
           <p:nvPr/>
         </p:nvSpPr>
@@ -2460,7 +2871,7 @@
       </p:sp>
       <p:sp>
         <p:nvSpPr>
-          <p:cNvPr id="26" name="Text 24"/>
+          <p:cNvPr id="28" name="Text 26"/>
           <p:cNvSpPr txBox="1"/>
           <p:nvPr/>
         </p:nvSpPr>
@@ -2516,7 +2927,7 @@
       </p:sp>
       <p:sp>
         <p:nvSpPr>
-          <p:cNvPr id="27" name="Shape 25"/>
+          <p:cNvPr id="29" name="Shape 27"/>
           <p:cNvSpPr/>
           <p:nvPr/>
         </p:nvSpPr>
@@ -2541,14 +2952,14 @@
       </p:sp>
       <p:sp>
         <p:nvSpPr>
-          <p:cNvPr id="28" name="Shape 26"/>
+          <p:cNvPr id="30" name="Shape 28"/>
           <p:cNvSpPr/>
           <p:nvPr/>
         </p:nvSpPr>
         <p:spPr>
           <a:xfrm>
-            <a:off x="9281160" y="2441448"/>
-            <a:ext cx="2679192" cy="4187952"/>
+            <a:off x="9281160" y="2450592"/>
+            <a:ext cx="2679192" cy="4178808"/>
           </a:xfrm>
           <a:prstGeom prst="roundRect">
             <a:avLst>
@@ -2568,13 +2979,13 @@
       </p:sp>
       <p:sp>
         <p:nvSpPr>
-          <p:cNvPr id="29" name="Text 27"/>
+          <p:cNvPr id="31" name="Text 29"/>
           <p:cNvSpPr txBox="1"/>
           <p:nvPr/>
         </p:nvSpPr>
         <p:spPr>
           <a:xfrm>
-            <a:off x="9464040" y="2532888"/>
+            <a:off x="9464040" y="2542032"/>
             <a:ext cx="2286000" cy="219456"/>
           </a:xfrm>
           <a:prstGeom prst="rect">
@@ -2607,14 +3018,14 @@
       </p:sp>
       <p:sp>
         <p:nvSpPr>
-          <p:cNvPr id="30" name="Text 28"/>
+          <p:cNvPr id="32" name="Text 30"/>
           <p:cNvSpPr txBox="1"/>
           <p:nvPr/>
         </p:nvSpPr>
         <p:spPr>
           <a:xfrm>
-            <a:off x="9464040" y="2788920"/>
-            <a:ext cx="2313432" cy="3785616"/>
+            <a:off x="9464040" y="2798064"/>
+            <a:ext cx="2313432" cy="3776472"/>
           </a:xfrm>
           <a:prstGeom prst="rect">
             <a:avLst/>
@@ -2664,7 +3075,7 @@
                 <a:ea typeface="Arial" pitchFamily="34" charset="-122"/>
                 <a:cs typeface="Arial" pitchFamily="34" charset="-120"/>
               </a:rPr>
-              <a:t>NO — a separate application, already built and running. It feeds the existing costing system by export and does not replace the costing method.</a:t>
+              <a:t>NO — a separate application, already built and running. It feeds the existing costing system by export.</a:t>
             </a:r>
             <a:endParaRPr lang="en-US" sz="880" dirty="0"/>
           </a:p>
@@ -2730,7 +3141,7 @@
                 <a:ea typeface="Arial" pitchFamily="34" charset="-122"/>
                 <a:cs typeface="Arial" pitchFamily="34" charset="-120"/>
               </a:rPr>
-              <a:t>YES — somewhere to host it, a disk that persists, and an API key. No new hardware.</a:t>
+              <a:t>YES — somewhere to host it, a disk that persists and an API key. No new hardware.</a:t>
             </a:r>
             <a:endParaRPr lang="en-US" sz="880" dirty="0"/>
           </a:p>
@@ -2773,7 +3184,7 @@
                 <a:ea typeface="Arial" pitchFamily="34" charset="-122"/>
                 <a:cs typeface="Arial" pitchFamily="34" charset="-120"/>
               </a:rPr>
-              <a:t>CAD and drawing files are processed on the server and are never sent out. Text taken from them — part name, dimensions, material, cost figures — goes to the Anthropic API so the ideas can be written, and so does a supplier quote if you upload one to be read. Accounts hold a work email and nothing else.</a:t>
+              <a:t>CAD and drawing files are processed on the server and never sent out. Text taken from them — part name, dimensions, material, cost figures — goes to the Anthropic API so the ideas can be written, as does a supplier quote if you upload one to be read.</a:t>
             </a:r>
             <a:endParaRPr lang="en-US" sz="880" dirty="0"/>
           </a:p>
@@ -2816,7 +3227,7 @@
                 <a:ea typeface="Arial" pitchFamily="34" charset="-122"/>
                 <a:cs typeface="Arial" pitchFamily="34" charset="-120"/>
               </a:rPr>
-              <a:t>3D CAD (STEP or native), 2D drawings, annual volume, and the current price or supplier quote where there is one.</a:t>
+              <a:t>3D CAD (STEP or native), 2D drawings, annual volume, and the current price or quote if there is one.</a:t>
             </a:r>
             <a:endParaRPr lang="en-US" sz="880" dirty="0"/>
           </a:p>
@@ -2859,7 +3270,50 @@
                 <a:ea typeface="Arial" pitchFamily="34" charset="-122"/>
                 <a:cs typeface="Arial" pitchFamily="34" charset="-120"/>
               </a:rPr>
-              <a:t>Excel, PowerPoint and PDF for the programme review.</a:t>
+              <a:t>Excel, PowerPoint and PDF for the review.</a:t>
+            </a:r>
+            <a:endParaRPr lang="en-US" sz="880" dirty="0"/>
+          </a:p>
+          <a:p>
+            <a:pPr indent="0" marL="0">
+              <a:lnSpc>
+                <a:spcPct val="92000"/>
+              </a:lnSpc>
+              <a:buNone/>
+            </a:pPr>
+            <a:r>
+              <a:rPr lang="en-US" sz="880" dirty="0">
+                <a:solidFill>
+                  <a:srgbClr val="1F2328"/>
+                </a:solidFill>
+                <a:latin typeface="Arial" pitchFamily="34" charset="0"/>
+                <a:ea typeface="Arial" pitchFamily="34" charset="-122"/>
+                <a:cs typeface="Arial" pitchFamily="34" charset="-120"/>
+              </a:rPr>
+              <a:t>What this is not:</a:t>
+            </a:r>
+            <a:endParaRPr lang="en-US" sz="880" dirty="0"/>
+          </a:p>
+          <a:p>
+            <a:pPr indent="0" marL="0">
+              <a:lnSpc>
+                <a:spcPct val="92000"/>
+              </a:lnSpc>
+              <a:spcAft>
+                <a:spcPts val="800"/>
+              </a:spcAft>
+              <a:buNone/>
+            </a:pPr>
+            <a:r>
+              <a:rPr lang="en-US" sz="780" dirty="0">
+                <a:solidFill>
+                  <a:srgbClr val="5B6570"/>
+                </a:solidFill>
+                <a:latin typeface="Arial" pitchFamily="34" charset="0"/>
+                <a:ea typeface="Arial" pitchFamily="34" charset="-122"/>
+                <a:cs typeface="Arial" pitchFamily="34" charset="-120"/>
+              </a:rPr>
+              <a:t>It does not replace the cost engineer's judgement or the established costing method. It does the data work and the first pass.</a:t>
             </a:r>
             <a:endParaRPr lang="en-US" sz="880" dirty="0"/>
           </a:p>

--- a/BrainSpark_Business_Case.pptx
+++ b/BrainSpark_Business_Case.pptx
@@ -3075,7 +3075,7 @@
                 <a:ea typeface="Arial" pitchFamily="34" charset="-122"/>
                 <a:cs typeface="Arial" pitchFamily="34" charset="-120"/>
               </a:rPr>
-              <a:t>NO — a separate application, already built and running. It feeds the existing costing system by export.</a:t>
+              <a:t>NO — a separate application, and it is already built and running.</a:t>
             </a:r>
             <a:endParaRPr lang="en-US" sz="880" dirty="0"/>
           </a:p>
@@ -3313,7 +3313,7 @@
                 <a:ea typeface="Arial" pitchFamily="34" charset="-122"/>
                 <a:cs typeface="Arial" pitchFamily="34" charset="-120"/>
               </a:rPr>
-              <a:t>It does not replace the cost engineer's judgement or the established costing method. It does the data work and the first pass.</a:t>
+              <a:t>It does not replace the cost engineer's judgement. It does the data work and the first pass; the decisions stay with the engineer.</a:t>
             </a:r>
             <a:endParaRPr lang="en-US" sz="880" dirty="0"/>
           </a:p>
